--- a/lecons/F1/09_F1_M2_PW04_Construction_and_Reading_of_a_Climograph.pptx
+++ b/lecons/F1/09_F1_M2_PW04_Construction_and_Reading_of_a_Climograph.pptx
@@ -56,9 +56,11 @@
     <p:sldId id="304" r:id="rId50"/>
     <p:sldId id="305" r:id="rId51"/>
     <p:sldId id="306" r:id="rId52"/>
+    <p:sldId id="307" r:id="rId53"/>
+    <p:sldId id="308" r:id="rId54"/>
   </p:sldIdLst>
   <p:notesMasterIdLst>
-    <p:notesMasterId r:id="rId53"/>
+    <p:notesMasterId r:id="rId55"/>
   </p:notesMasterIdLst>
   <p:sldSz cx="12192000" cy="6858000"/>
   <p:notesSz cx="6858000" cy="12192000"/>
@@ -728,7 +730,7 @@
           <a:p>
             <a:r>
               <a:rPr lang="en-US" dirty="0"/>
-              <a:t>Good. The class must show temperature and rainfall in one drawing.</a:t>
+              <a:t>Good. The class does not know how to show temperature and rainfall in one clear drawing.</a:t>
             </a:r>
             <a:endParaRPr lang="en-US" dirty="0"/>
           </a:p>
@@ -992,7 +994,7 @@
           <a:p>
             <a:r>
               <a:rPr lang="en-US" dirty="0"/>
-              <a:t>Question 3: How is rainfall shown? Think for a moment, then raise your hand to answer.</a:t>
+              <a:t>Question 3: How is rainfall shown on it? Think for a moment, then raise your hand to answer.</a:t>
             </a:r>
             <a:endParaRPr lang="en-US" dirty="0"/>
           </a:p>
@@ -1344,7 +1346,7 @@
           <a:p>
             <a:r>
               <a:rPr lang="en-US" dirty="0"/>
-              <a:t>Activity 1. Look carefully at this diagram: the climograph of Garoua. Observe every detail before I ask the question.</a:t>
+              <a:t>Activity 1. Look carefully at this diagram: a graph of the climate of Garoua. Observe every detail before I ask the question.</a:t>
             </a:r>
             <a:endParaRPr lang="en-US" dirty="0"/>
           </a:p>
@@ -1432,7 +1434,7 @@
           <a:p>
             <a:r>
               <a:rPr lang="en-US" dirty="0"/>
-              <a:t>Here is the question for Activity 1: What does the red line show? What do the blue bars show? Take one minute to think and write your answer in your rough notebook.</a:t>
+              <a:t>Here is the question for Activity 1: What does the red line show? Take one minute to think and write your answer in your rough notebook.</a:t>
             </a:r>
             <a:endParaRPr lang="en-US" dirty="0"/>
           </a:p>
@@ -1608,7 +1610,7 @@
           <a:p>
             <a:r>
               <a:rPr lang="en-US" dirty="0"/>
-              <a:t>Let us check the answer together. The red line shows temperature; the blue bars show rainfall.</a:t>
+              <a:t>Let us check the answer together. The temperature of each month.</a:t>
             </a:r>
             <a:endParaRPr lang="en-US" dirty="0"/>
           </a:p>
@@ -1696,7 +1698,7 @@
           <a:p>
             <a:r>
               <a:rPr lang="en-US" dirty="0"/>
-              <a:t>Activity 2. Look carefully at this diagram: the axes of a climograph. Observe every detail before I ask the question.</a:t>
+              <a:t>Activity 2. Look carefully at this diagram: a graph of the climate of Garoua. Observe every detail before I ask the question.</a:t>
             </a:r>
             <a:endParaRPr lang="en-US" dirty="0"/>
           </a:p>
@@ -1784,7 +1786,7 @@
           <a:p>
             <a:r>
               <a:rPr lang="en-US" dirty="0"/>
-              <a:t>Here is the question for Activity 2: What is written on the horizontal axis and on the two vertical axes? Take one minute to think and write your answer in your rough notebook.</a:t>
+              <a:t>Here is the question for Activity 2: What do the blue bars show? Take one minute to think and write your answer in your rough notebook.</a:t>
             </a:r>
             <a:endParaRPr lang="en-US" dirty="0"/>
           </a:p>
@@ -1872,7 +1874,7 @@
           <a:p>
             <a:r>
               <a:rPr lang="en-US" dirty="0"/>
-              <a:t>Let us check the answer together. Months on the horizontal axis; rainfall (mm) on one side and temperature (°C) on the other.</a:t>
+              <a:t>Let us check the answer together. The rainfall of each month.</a:t>
             </a:r>
             <a:endParaRPr lang="en-US" dirty="0"/>
           </a:p>
@@ -2048,7 +2050,7 @@
           <a:p>
             <a:r>
               <a:rPr lang="en-US" dirty="0"/>
-              <a:t>Here is the question for Activity 3: Which part is drawn first: the bars or the line? Take one minute to think and write your answer in your rough notebook.</a:t>
+              <a:t>Here is the question for Activity 3: What is written on the horizontal axis of a climograph? Take one minute to think and write your answer in your rough notebook.</a:t>
             </a:r>
             <a:endParaRPr lang="en-US" dirty="0"/>
           </a:p>
@@ -2136,7 +2138,7 @@
           <a:p>
             <a:r>
               <a:rPr lang="en-US" dirty="0"/>
-              <a:t>Let us check the answer together. We draw the rainfall bars first, then plot the temperatures as points and join them with a line.</a:t>
+              <a:t>Let us check the answer together. The twelve months of the year.</a:t>
             </a:r>
             <a:endParaRPr lang="en-US" dirty="0"/>
           </a:p>
@@ -2312,7 +2314,7 @@
           <a:p>
             <a:r>
               <a:rPr lang="en-US" dirty="0"/>
-              <a:t>Here is the question for Activity 4: Which is the wettest month and which is the hottest month in Garoua? Take one minute to think and write your answer in your rough notebook.</a:t>
+              <a:t>Here is the question for Activity 4: Which is the wettest month in Garoua? Take one minute to think and write your answer in your rough notebook.</a:t>
             </a:r>
             <a:endParaRPr lang="en-US" dirty="0"/>
           </a:p>
@@ -2400,7 +2402,7 @@
           <a:p>
             <a:r>
               <a:rPr lang="en-US" dirty="0"/>
-              <a:t>Let us check the answer together. The wettest is August (about 250 mm); the hottest is April (about 33 °C).</a:t>
+              <a:t>Let us check the answer together. August, with about 250 mm of rain.</a:t>
             </a:r>
             <a:endParaRPr lang="en-US" dirty="0"/>
           </a:p>
@@ -2752,7 +2754,7 @@
           <a:p>
             <a:r>
               <a:rPr lang="en-US" dirty="0"/>
-              <a:t>Let us check the answer together. Yaoundé has rain in almost every month; Garoua has a long dry season with no rain.</a:t>
+              <a:t>Let us check the answer together. Yaoundé has rain in almost every month, while Garoua has a long dry season with no rain.</a:t>
             </a:r>
             <a:endParaRPr lang="en-US" dirty="0"/>
           </a:p>
@@ -2928,7 +2930,7 @@
           <a:p>
             <a:r>
               <a:rPr lang="en-US" dirty="0"/>
-              <a:t>Let us copy the definitions. The key terms of this lesson are defined as follows. On this slide we have Climograph. Write each point on a new line, with the key term first, and explain it in your own words when we revise.</a:t>
+              <a:t>Let us copy the definitions. The key terms of this lesson are defined as follows. On this slide we have Climograph and Weather station. Write each point on a new line, with the key term first, and explain it in your own words when we revise.</a:t>
             </a:r>
             <a:endParaRPr lang="en-US" dirty="0"/>
           </a:p>
@@ -3016,7 +3018,7 @@
           <a:p>
             <a:r>
               <a:rPr lang="en-US" dirty="0"/>
-              <a:t>Let us copy Steps to Draw a Climograph. We draw a climograph in the following steps. On this slide we have Step 1 and Step 2. Write each point on a new line, with the key term first, and explain it in your own words when we revise. When you finish, we go to the next slide.</a:t>
+              <a:t>Let us copy Construction of a Climograph. We draw a climograph in the following steps. Copy the point on Step 1 on the left, then draw the diagram on the right: climate data of Garoua. Give it a title and label it clearly.</a:t>
             </a:r>
             <a:endParaRPr lang="en-US" dirty="0"/>
           </a:p>
@@ -3104,7 +3106,7 @@
           <a:p>
             <a:r>
               <a:rPr lang="en-US" dirty="0"/>
-              <a:t>We continue with Steps to Draw a Climograph. On this slide we have Step 3 and Step 4. Write each point on a new line, with the key term first, and explain it in your own words when we revise.</a:t>
+              <a:t>We continue with Construction of a Climograph. On this slide we have Step 2 and Step 3. Write each point on a new line, with the key term first, and explain it in your own words when we revise. When you finish, we go to the next slide.</a:t>
             </a:r>
             <a:endParaRPr lang="en-US" dirty="0"/>
           </a:p>
@@ -3192,7 +3194,7 @@
           <a:p>
             <a:r>
               <a:rPr lang="en-US" dirty="0"/>
-              <a:t>Now draw this illustration in your notebook: the climograph of Garoua. Give it a title and label it clearly.</a:t>
+              <a:t>We continue with Construction of a Climograph. On this slide we have Step 4. Write each point on a new line, with the key term first, and explain it in your own words when we revise.</a:t>
             </a:r>
             <a:endParaRPr lang="en-US" dirty="0"/>
           </a:p>
@@ -3280,7 +3282,7 @@
           <a:p>
             <a:r>
               <a:rPr lang="en-US" dirty="0"/>
-              <a:t>Let us copy Reading a Climograph. We read a climograph as follows. On this slide we have Rainfall and Temperature. Write each point on a new line, with the key term first, and explain it in your own words when we revise. When you finish, we go to the next slide.</a:t>
+              <a:t>Copy the point on Step 5 on the left, then draw the diagram on the right: the climograph of Garoua. Give it a title and label it clearly.</a:t>
             </a:r>
             <a:endParaRPr lang="en-US" dirty="0"/>
           </a:p>
@@ -3368,7 +3370,7 @@
           <a:p>
             <a:r>
               <a:rPr lang="en-US" dirty="0"/>
-              <a:t>We continue with Reading a Climograph. On this slide we have Conclusion. Write each point on a new line, with the key term first, and explain it in your own words when we revise.</a:t>
+              <a:t>Let us copy Reading a Climograph. We read a climograph as follows. On this slide we have Rainfall and Temperature. Write each point on a new line, with the key term first, and explain it in your own words when we revise. When you finish, we go to the next slide.</a:t>
             </a:r>
             <a:endParaRPr lang="en-US" dirty="0"/>
           </a:p>
@@ -3544,7 +3546,7 @@
           <a:p>
             <a:r>
               <a:rPr lang="en-US" dirty="0"/>
-              <a:t>Now let us check what you have understood. Question 1: What two elements does a climograph show? Answer in your exercise book.</a:t>
+              <a:t>We continue with Reading a Climograph. On this slide we have Type of climate. Write each point on a new line, with the key term first, and explain it in your own words when we revise.</a:t>
             </a:r>
             <a:endParaRPr lang="en-US" dirty="0"/>
           </a:p>
@@ -3632,7 +3634,7 @@
           <a:p>
             <a:r>
               <a:rPr lang="en-US" dirty="0"/>
-              <a:t>The expected answer is: temperature and rainfall. If you got it right, well done.</a:t>
+              <a:t>Copy the point on Interpretation on the left, then draw the diagram on the right: the climograph of Garoua. Give it a title and label it clearly.</a:t>
             </a:r>
             <a:endParaRPr lang="en-US" dirty="0"/>
           </a:p>
@@ -3720,7 +3722,7 @@
           <a:p>
             <a:r>
               <a:rPr lang="en-US" dirty="0"/>
-              <a:t>Now let us check what you have understood. Question 2: The hottest month is 33 °C and the coolest 26 °C. Find the annual range. Answer in your exercise book.</a:t>
+              <a:t>Now let us check what you have understood. Question 1: What two elements does a climograph show? Answer in your exercise book.</a:t>
             </a:r>
             <a:endParaRPr lang="en-US" dirty="0"/>
           </a:p>
@@ -3808,7 +3810,7 @@
           <a:p>
             <a:r>
               <a:rPr lang="en-US" dirty="0"/>
-              <a:t>The expected answer is: 33 − 26 = 7 °C. If you got it right, well done.</a:t>
+              <a:t>The expected answer is: temperature and rainfall. If you got it right, well done.</a:t>
             </a:r>
             <a:endParaRPr lang="en-US" dirty="0"/>
           </a:p>
@@ -3896,7 +3898,7 @@
           <a:p>
             <a:r>
               <a:rPr lang="en-US" dirty="0"/>
-              <a:t>For those who need more practice, fill in the blanks in your exercise book. The answers are: number 1, bars; number 2, line; number 3, range.</a:t>
+              <a:t>Now let us check what you have understood. Question 2: The hottest month is 33 °C and the coolest 26 °C. Find the annual range. Answer in your exercise book.</a:t>
             </a:r>
             <a:endParaRPr lang="en-US" dirty="0"/>
           </a:p>
@@ -3984,7 +3986,7 @@
           <a:p>
             <a:r>
               <a:rPr lang="en-US" dirty="0"/>
-              <a:t>For your homework: Draw the climograph of Garoua using the data given in class. We shall correct it at the beginning of our next lesson.</a:t>
+              <a:t>The expected answer is: 33 − 26 = 7 °C. If you got it right, well done.</a:t>
             </a:r>
             <a:endParaRPr lang="en-US" dirty="0"/>
           </a:p>
@@ -4072,7 +4074,7 @@
           <a:p>
             <a:r>
               <a:rPr lang="en-US" dirty="0"/>
-              <a:t>Our next lesson will be on Lesson 6: Forms of Degradation of the Natural Regions of Cameroon. Thank you for your attention, and see you next time.</a:t>
+              <a:t>For those who need more practice, fill in the blanks in your exercise book. The answers are: number 1, bars; number 2, line; number 3, range.</a:t>
             </a:r>
             <a:endParaRPr lang="en-US" dirty="0"/>
           </a:p>
@@ -4160,7 +4162,7 @@
           <a:p>
             <a:r>
               <a:rPr lang="en-US" dirty="0"/>
-              <a:t>Let us play the bilingual game. I say a word in English, and you give me the French word. Then we do the reverse.</a:t>
+              <a:t>For your homework: Draw the climograph of Garoua using the data given in class. We shall correct it at the beginning of our next lesson.</a:t>
             </a:r>
             <a:endParaRPr lang="en-US" dirty="0"/>
           </a:p>
@@ -4248,7 +4250,7 @@
           <a:p>
             <a:r>
               <a:rPr lang="en-US" dirty="0"/>
-              <a:t>I record this information in the official logbook of the class after the lesson.</a:t>
+              <a:t>Our next lesson will be on Lesson 6: Forms of Degradation of the Natural Regions of Cameroon. Thank you for your attention, and see you next time.</a:t>
             </a:r>
             <a:endParaRPr lang="en-US" dirty="0"/>
           </a:p>
@@ -4336,7 +4338,7 @@
           <a:p>
             <a:r>
               <a:rPr lang="en-US" dirty="0"/>
-              <a:t>I complete the second page of the logbook: the matter taught, the evaluation, the homework and the attendance.</a:t>
+              <a:t>Let us play the bilingual game. I say a word in English, and you give me the French word. Then we do the reverse.</a:t>
             </a:r>
             <a:endParaRPr lang="en-US" dirty="0"/>
           </a:p>
@@ -4512,7 +4514,7 @@
           <a:p>
             <a:r>
               <a:rPr lang="en-US" dirty="0"/>
-              <a:t>This slide is for me, the teacher: it gives the timing of the lesson and what to do if the projector is not available.</a:t>
+              <a:t>I record this information in the official logbook of the class after the lesson.</a:t>
             </a:r>
             <a:endParaRPr lang="en-US" dirty="0"/>
           </a:p>
@@ -4600,7 +4602,7 @@
           <a:p>
             <a:r>
               <a:rPr lang="en-US" dirty="0"/>
-              <a:t>These are the references and picture credits used to prepare this lesson.</a:t>
+              <a:t>I complete the second page of the logbook: the matter taught, the evaluation, the homework and the attendance.</a:t>
             </a:r>
             <a:endParaRPr lang="en-US" dirty="0"/>
           </a:p>
@@ -4624,6 +4626,182 @@
             <a:fld id="{F7021451-1387-4CA6-816F-3879F97B5CBC}" type="slidenum">
               <a:rPr lang="en-US"/>
               <a:t>51</a:t>
+            </a:fld>
+            <a:endParaRPr lang="en-US"/>
+          </a:p>
+        </p:txBody>
+      </p:sp>
+    </p:spTree>
+    <p:extLst>
+      <p:ext uri="{BB962C8B-B14F-4D97-AF65-F5344CB8AC3E}">
+        <p14:creationId xmlns:p14="http://schemas.microsoft.com/office/powerpoint/2010/main" val="1024086991"/>
+      </p:ext>
+    </p:extLst>
+  </p:cSld>
+  <p:clrMapOvr>
+    <a:masterClrMapping/>
+  </p:clrMapOvr>
+</p:notes>
+</file>
+
+<file path=ppt/notesSlides/notesSlide52.xml><?xml version="1.0" encoding="utf-8"?>
+<p:notes xmlns:a="http://schemas.openxmlformats.org/drawingml/2006/main" xmlns:r="http://schemas.openxmlformats.org/officeDocument/2006/relationships" xmlns:p="http://schemas.openxmlformats.org/presentationml/2006/main">
+  <p:cSld>
+    <p:spTree>
+      <p:nvGrpSpPr>
+        <p:cNvPr id="1" name=""/>
+        <p:cNvGrpSpPr/>
+        <p:nvPr/>
+      </p:nvGrpSpPr>
+      <p:grpSpPr>
+        <a:xfrm>
+          <a:off x="0" y="0"/>
+          <a:ext cx="0" cy="0"/>
+          <a:chOff x="0" y="0"/>
+          <a:chExt cx="0" cy="0"/>
+        </a:xfrm>
+      </p:grpSpPr>
+      <p:sp>
+        <p:nvSpPr>
+          <p:cNvPr id="2" name="Slide Image Placeholder 1"/>
+          <p:cNvSpPr>
+            <a:spLocks noGrp="1" noRot="1" noChangeAspect="1"/>
+          </p:cNvSpPr>
+          <p:nvPr>
+            <p:ph type="sldImg"/>
+          </p:nvPr>
+        </p:nvSpPr>
+        <p:spPr/>
+      </p:sp>
+      <p:sp>
+        <p:nvSpPr>
+          <p:cNvPr id="3" name="Notes Placeholder 2"/>
+          <p:cNvSpPr>
+            <a:spLocks noGrp="1"/>
+          </p:cNvSpPr>
+          <p:nvPr>
+            <p:ph type="body" idx="1"/>
+          </p:nvPr>
+        </p:nvSpPr>
+        <p:spPr/>
+        <p:txBody>
+          <a:bodyPr/>
+          <a:lstStyle/>
+          <a:p>
+            <a:r>
+              <a:rPr lang="en-US" dirty="0"/>
+              <a:t>This slide is for me, the teacher: it gives the timing of the lesson and what to do if the projector is not available.</a:t>
+            </a:r>
+            <a:endParaRPr lang="en-US" dirty="0"/>
+          </a:p>
+        </p:txBody>
+      </p:sp>
+      <p:sp>
+        <p:nvSpPr>
+          <p:cNvPr id="4" name="Slide Number Placeholder 3"/>
+          <p:cNvSpPr>
+            <a:spLocks noGrp="1"/>
+          </p:cNvSpPr>
+          <p:nvPr>
+            <p:ph type="sldNum" sz="quarter" idx="10"/>
+          </p:nvPr>
+        </p:nvSpPr>
+        <p:spPr/>
+        <p:txBody>
+          <a:bodyPr/>
+          <a:lstStyle/>
+          <a:p>
+            <a:fld id="{F7021451-1387-4CA6-816F-3879F97B5CBC}" type="slidenum">
+              <a:rPr lang="en-US"/>
+              <a:t>52</a:t>
+            </a:fld>
+            <a:endParaRPr lang="en-US"/>
+          </a:p>
+        </p:txBody>
+      </p:sp>
+    </p:spTree>
+    <p:extLst>
+      <p:ext uri="{BB962C8B-B14F-4D97-AF65-F5344CB8AC3E}">
+        <p14:creationId xmlns:p14="http://schemas.microsoft.com/office/powerpoint/2010/main" val="1024086991"/>
+      </p:ext>
+    </p:extLst>
+  </p:cSld>
+  <p:clrMapOvr>
+    <a:masterClrMapping/>
+  </p:clrMapOvr>
+</p:notes>
+</file>
+
+<file path=ppt/notesSlides/notesSlide53.xml><?xml version="1.0" encoding="utf-8"?>
+<p:notes xmlns:a="http://schemas.openxmlformats.org/drawingml/2006/main" xmlns:r="http://schemas.openxmlformats.org/officeDocument/2006/relationships" xmlns:p="http://schemas.openxmlformats.org/presentationml/2006/main">
+  <p:cSld>
+    <p:spTree>
+      <p:nvGrpSpPr>
+        <p:cNvPr id="1" name=""/>
+        <p:cNvGrpSpPr/>
+        <p:nvPr/>
+      </p:nvGrpSpPr>
+      <p:grpSpPr>
+        <a:xfrm>
+          <a:off x="0" y="0"/>
+          <a:ext cx="0" cy="0"/>
+          <a:chOff x="0" y="0"/>
+          <a:chExt cx="0" cy="0"/>
+        </a:xfrm>
+      </p:grpSpPr>
+      <p:sp>
+        <p:nvSpPr>
+          <p:cNvPr id="2" name="Slide Image Placeholder 1"/>
+          <p:cNvSpPr>
+            <a:spLocks noGrp="1" noRot="1" noChangeAspect="1"/>
+          </p:cNvSpPr>
+          <p:nvPr>
+            <p:ph type="sldImg"/>
+          </p:nvPr>
+        </p:nvSpPr>
+        <p:spPr/>
+      </p:sp>
+      <p:sp>
+        <p:nvSpPr>
+          <p:cNvPr id="3" name="Notes Placeholder 2"/>
+          <p:cNvSpPr>
+            <a:spLocks noGrp="1"/>
+          </p:cNvSpPr>
+          <p:nvPr>
+            <p:ph type="body" idx="1"/>
+          </p:nvPr>
+        </p:nvSpPr>
+        <p:spPr/>
+        <p:txBody>
+          <a:bodyPr/>
+          <a:lstStyle/>
+          <a:p>
+            <a:r>
+              <a:rPr lang="en-US" dirty="0"/>
+              <a:t>These are the references and picture credits used to prepare this lesson.</a:t>
+            </a:r>
+            <a:endParaRPr lang="en-US" dirty="0"/>
+          </a:p>
+        </p:txBody>
+      </p:sp>
+      <p:sp>
+        <p:nvSpPr>
+          <p:cNvPr id="4" name="Slide Number Placeholder 3"/>
+          <p:cNvSpPr>
+            <a:spLocks noGrp="1"/>
+          </p:cNvSpPr>
+          <p:nvPr>
+            <p:ph type="sldNum" sz="quarter" idx="10"/>
+          </p:nvPr>
+        </p:nvSpPr>
+        <p:spPr/>
+        <p:txBody>
+          <a:bodyPr/>
+          <a:lstStyle/>
+          <a:p>
+            <a:fld id="{F7021451-1387-4CA6-816F-3879F97B5CBC}" type="slidenum">
+              <a:rPr lang="en-US"/>
+              <a:t>53</a:t>
             </a:fld>
             <a:endParaRPr lang="en-US"/>
           </a:p>
@@ -4952,7 +5130,7 @@
           <a:p>
             <a:r>
               <a:rPr lang="en-US" dirty="0"/>
-              <a:t>Listen carefully to this situation from real life. The weather station of Garoua airport gives the class a table of 12 monthly temperatures and rainfall amounts. The class must show this information in one clear drawing. Think about it, because I am going to ask you some questions.</a:t>
+              <a:t>Listen carefully to this situation from real life. The weather station of Garoua airport gives the class a table of 12 monthly temperatures and rainfall amounts. The table is hard to read. The class asks the teacher: "How can we show all these numbers in one clear drawing?" Think about it, because I am going to ask you some questions.</a:t>
             </a:r>
             <a:endParaRPr lang="en-US" dirty="0"/>
           </a:p>
@@ -6635,7 +6813,7 @@
                 <a:ea typeface="Times New Roman" pitchFamily="34" charset="-122"/>
                 <a:cs typeface="Times New Roman" pitchFamily="34" charset="-120"/>
               </a:rPr>
-              <a:t>The class must show temperature and rainfall in one drawing.</a:t>
+              <a:t>The class does not know how to show temperature and rainfall in one clear drawing.</a:t>
             </a:r>
             <a:endParaRPr lang="en-US" sz="4000" dirty="0"/>
           </a:p>
@@ -7292,7 +7470,7 @@
                 <a:ea typeface="Times New Roman" pitchFamily="34" charset="-122"/>
                 <a:cs typeface="Times New Roman" pitchFamily="34" charset="-120"/>
               </a:rPr>
-              <a:t>How is rainfall shown?</a:t>
+              <a:t>How is rainfall shown on it?</a:t>
             </a:r>
             <a:endParaRPr lang="en-US" sz="4000" dirty="0"/>
           </a:p>
@@ -8163,7 +8341,7 @@
                 <a:ea typeface="Times New Roman" pitchFamily="34" charset="-122"/>
                 <a:cs typeface="Times New Roman" pitchFamily="34" charset="-120"/>
               </a:rPr>
-              <a:t>The climograph of Garoua.</a:t>
+              <a:t>A graph of the climate of Garoua.</a:t>
             </a:r>
             <a:endParaRPr lang="en-US" sz="1800" dirty="0"/>
           </a:p>
@@ -8382,7 +8560,7 @@
                 <a:ea typeface="Times New Roman" pitchFamily="34" charset="-122"/>
                 <a:cs typeface="Times New Roman" pitchFamily="34" charset="-120"/>
               </a:rPr>
-              <a:t>What does the red line show? What do the blue bars show?</a:t>
+              <a:t>What does the red line show?</a:t>
             </a:r>
             <a:endParaRPr lang="en-US" sz="4000" dirty="0"/>
           </a:p>
@@ -9196,7 +9374,7 @@
                 <a:ea typeface="Times New Roman" pitchFamily="34" charset="-122"/>
                 <a:cs typeface="Times New Roman" pitchFamily="34" charset="-120"/>
               </a:rPr>
-              <a:t>The red line shows temperature; the blue bars show rainfall.</a:t>
+              <a:t>The temperature of each month.</a:t>
             </a:r>
             <a:endParaRPr lang="en-US" sz="4000" dirty="0"/>
           </a:p>
@@ -9308,7 +9486,7 @@
                 <a:ea typeface="Calibri" pitchFamily="34" charset="-122"/>
                 <a:cs typeface="Calibri" pitchFamily="34" charset="-120"/>
               </a:rPr>
-              <a:t>2. CONSTRUCTION</a:t>
+              <a:t>1. MEANING OF A CLIMOGRAPH</a:t>
             </a:r>
             <a:endParaRPr lang="en-US" sz="1400" dirty="0"/>
           </a:p>
@@ -9410,7 +9588,7 @@
                 <a:ea typeface="Times New Roman" pitchFamily="34" charset="-122"/>
                 <a:cs typeface="Times New Roman" pitchFamily="34" charset="-120"/>
               </a:rPr>
-              <a:t>The axes of a climograph.</a:t>
+              <a:t>A graph of the climate of Garoua.</a:t>
             </a:r>
             <a:endParaRPr lang="en-US" sz="1800" dirty="0"/>
           </a:p>
@@ -9522,7 +9700,7 @@
                 <a:ea typeface="Calibri" pitchFamily="34" charset="-122"/>
                 <a:cs typeface="Calibri" pitchFamily="34" charset="-120"/>
               </a:rPr>
-              <a:t>2. CONSTRUCTION</a:t>
+              <a:t>1. MEANING OF A CLIMOGRAPH</a:t>
             </a:r>
             <a:endParaRPr lang="en-US" sz="1400" dirty="0"/>
           </a:p>
@@ -9629,7 +9807,7 @@
                 <a:ea typeface="Times New Roman" pitchFamily="34" charset="-122"/>
                 <a:cs typeface="Times New Roman" pitchFamily="34" charset="-120"/>
               </a:rPr>
-              <a:t>What is written on the horizontal axis and on the two vertical axes?</a:t>
+              <a:t>What do the blue bars show?</a:t>
             </a:r>
             <a:endParaRPr lang="en-US" sz="4000" dirty="0"/>
           </a:p>
@@ -9741,7 +9919,7 @@
                 <a:ea typeface="Calibri" pitchFamily="34" charset="-122"/>
                 <a:cs typeface="Calibri" pitchFamily="34" charset="-120"/>
               </a:rPr>
-              <a:t>2. CONSTRUCTION</a:t>
+              <a:t>1. MEANING OF A CLIMOGRAPH</a:t>
             </a:r>
             <a:endParaRPr lang="en-US" sz="1400" dirty="0"/>
           </a:p>
@@ -9848,7 +10026,7 @@
                 <a:ea typeface="Times New Roman" pitchFamily="34" charset="-122"/>
                 <a:cs typeface="Times New Roman" pitchFamily="34" charset="-120"/>
               </a:rPr>
-              <a:t>Months on the horizontal axis; rainfall (mm) on one side and temperature (°C) on the other.</a:t>
+              <a:t>The rainfall of each month.</a:t>
             </a:r>
             <a:endParaRPr lang="en-US" sz="4000" dirty="0"/>
           </a:p>
@@ -10281,7 +10459,7 @@
                 <a:ea typeface="Times New Roman" pitchFamily="34" charset="-122"/>
                 <a:cs typeface="Times New Roman" pitchFamily="34" charset="-120"/>
               </a:rPr>
-              <a:t>Which part is drawn first: the bars or the line?</a:t>
+              <a:t>What is written on the horizontal axis of a climograph?</a:t>
             </a:r>
             <a:endParaRPr lang="en-US" sz="4000" dirty="0"/>
           </a:p>
@@ -10500,7 +10678,7 @@
                 <a:ea typeface="Times New Roman" pitchFamily="34" charset="-122"/>
                 <a:cs typeface="Times New Roman" pitchFamily="34" charset="-120"/>
               </a:rPr>
-              <a:t>We draw the rainfall bars first, then plot the temperatures as points and join them with a line.</a:t>
+              <a:t>The twelve months of the year.</a:t>
             </a:r>
             <a:endParaRPr lang="en-US" sz="4000" dirty="0"/>
           </a:p>
@@ -10933,7 +11111,7 @@
                 <a:ea typeface="Times New Roman" pitchFamily="34" charset="-122"/>
                 <a:cs typeface="Times New Roman" pitchFamily="34" charset="-120"/>
               </a:rPr>
-              <a:t>Which is the wettest month and which is the hottest month in Garoua?</a:t>
+              <a:t>Which is the wettest month in Garoua?</a:t>
             </a:r>
             <a:endParaRPr lang="en-US" sz="4000" dirty="0"/>
           </a:p>
@@ -11152,7 +11330,7 @@
                 <a:ea typeface="Times New Roman" pitchFamily="34" charset="-122"/>
                 <a:cs typeface="Times New Roman" pitchFamily="34" charset="-120"/>
               </a:rPr>
-              <a:t>The wettest is August (about 250 mm); the hottest is April (about 33 °C).</a:t>
+              <a:t>August, with about 250 mm of rain.</a:t>
             </a:r>
             <a:endParaRPr lang="en-US" sz="4000" dirty="0"/>
           </a:p>
@@ -11973,7 +12151,7 @@
                           <a:ea typeface="Calibri" pitchFamily="34" charset="-122"/>
                           <a:cs typeface="Calibri" pitchFamily="34" charset="-120"/>
                         </a:rPr>
-                        <a:t>Definition of a temperature-rainfall graph; construction and reading of a climograph using data from a weather station of the region.</a:t>
+                        <a:t>Theoretical basis: define a temperature-rainfall graph. Construct and read a climograph based on data from a weather station in the region.</a:t>
                       </a:r>
                       <a:endParaRPr lang="en-US" sz="1700" dirty="0">
                         <a:latin typeface="Calibri" charset="0"/>
@@ -12273,7 +12451,7 @@
                 <a:ea typeface="Calibri" pitchFamily="34" charset="-122"/>
                 <a:cs typeface="Calibri" pitchFamily="34" charset="-120"/>
               </a:rPr>
-              <a:t>3. COMPARISON</a:t>
+              <a:t>3. READING</a:t>
             </a:r>
             <a:endParaRPr lang="en-US" sz="1400" dirty="0"/>
           </a:p>
@@ -12487,7 +12665,7 @@
                 <a:ea typeface="Calibri" pitchFamily="34" charset="-122"/>
                 <a:cs typeface="Calibri" pitchFamily="34" charset="-120"/>
               </a:rPr>
-              <a:t>3. COMPARISON</a:t>
+              <a:t>3. READING</a:t>
             </a:r>
             <a:endParaRPr lang="en-US" sz="1400" dirty="0"/>
           </a:p>
@@ -12706,7 +12884,7 @@
                 <a:ea typeface="Calibri" pitchFamily="34" charset="-122"/>
                 <a:cs typeface="Calibri" pitchFamily="34" charset="-120"/>
               </a:rPr>
-              <a:t>3. COMPARISON</a:t>
+              <a:t>3. READING</a:t>
             </a:r>
             <a:endParaRPr lang="en-US" sz="1400" dirty="0"/>
           </a:p>
@@ -12813,7 +12991,7 @@
                 <a:ea typeface="Times New Roman" pitchFamily="34" charset="-122"/>
                 <a:cs typeface="Times New Roman" pitchFamily="34" charset="-120"/>
               </a:rPr>
-              <a:t>Yaoundé has rain in almost every month; Garoua has a long dry season with no rain.</a:t>
+              <a:t>Yaoundé has rain in almost every month, while Garoua has a long dry season with no rain.</a:t>
             </a:r>
             <a:endParaRPr lang="en-US" sz="4000" dirty="0"/>
           </a:p>
@@ -13207,7 +13385,7 @@
         <p:spPr>
           <a:xfrm>
             <a:off x="0" y="658368"/>
-            <a:ext cx="5120640" cy="5833872"/>
+            <a:ext cx="1463040" cy="5833872"/>
           </a:xfrm>
           <a:prstGeom prst="rect">
             <a:avLst/>
@@ -13222,8 +13400,8 @@
         </p:nvSpPr>
         <p:spPr>
           <a:xfrm>
-            <a:off x="5349240" y="1005840"/>
-            <a:ext cx="6522415" cy="731520"/>
+            <a:off x="1691640" y="1005840"/>
+            <a:ext cx="10180015" cy="731520"/>
           </a:xfrm>
           <a:prstGeom prst="rect">
             <a:avLst/>
@@ -13263,8 +13441,8 @@
         </p:nvSpPr>
         <p:spPr>
           <a:xfrm>
-            <a:off x="5349240" y="1783080"/>
-            <a:ext cx="6522415" cy="4663440"/>
+            <a:off x="1691640" y="1783080"/>
+            <a:ext cx="10180015" cy="4663440"/>
           </a:xfrm>
           <a:prstGeom prst="rect">
             <a:avLst/>
@@ -13329,6 +13507,43 @@
                 <a:cs typeface="Times New Roman" pitchFamily="34" charset="-120"/>
               </a:rPr>
               <a:t>It is a graph that shows the monthly temperature and rainfall of a place.</a:t>
+            </a:r>
+            <a:endParaRPr lang="en-US" sz="4000" dirty="0"/>
+          </a:p>
+          <a:p>
+            <a:pPr algn="l" indent="0" marL="0">
+              <a:spcAft>
+                <a:spcPts val="800"/>
+              </a:spcAft>
+              <a:buNone/>
+            </a:pPr>
+            <a:r>
+              <a:rPr lang="en-US" sz="4000" b="1" dirty="0">
+                <a:solidFill>
+                  <a:srgbClr val="111111"/>
+                </a:solidFill>
+                <a:latin typeface="Times New Roman" pitchFamily="34" charset="0"/>
+                <a:ea typeface="Times New Roman" pitchFamily="34" charset="-122"/>
+                <a:cs typeface="Times New Roman" pitchFamily="34" charset="-120"/>
+              </a:rPr>
+              <a:t>Weather station: </a:t>
+            </a:r>
+            <a:pPr algn="l" indent="0" marL="0">
+              <a:spcAft>
+                <a:spcPts val="800"/>
+              </a:spcAft>
+              <a:buNone/>
+            </a:pPr>
+            <a:r>
+              <a:rPr lang="en-US" sz="4000" dirty="0">
+                <a:solidFill>
+                  <a:srgbClr val="111111"/>
+                </a:solidFill>
+                <a:latin typeface="Times New Roman" pitchFamily="34" charset="0"/>
+                <a:ea typeface="Times New Roman" pitchFamily="34" charset="-122"/>
+                <a:cs typeface="Times New Roman" pitchFamily="34" charset="-120"/>
+              </a:rPr>
+              <a:t>It is a place where instruments measure temperature, rainfall and other weather elements.</a:t>
             </a:r>
             <a:endParaRPr lang="en-US" sz="4000" dirty="0"/>
           </a:p>
@@ -13446,9 +13661,129 @@
           </a:p>
         </p:txBody>
       </p:sp>
+      <p:sp>
+        <p:nvSpPr>
+          <p:cNvPr id="3" name="Text 1"/>
+          <p:cNvSpPr/>
+          <p:nvPr/>
+        </p:nvSpPr>
+        <p:spPr>
+          <a:xfrm>
+            <a:off x="365760" y="1005840"/>
+            <a:ext cx="11460175" cy="731520"/>
+          </a:xfrm>
+          <a:prstGeom prst="rect">
+            <a:avLst/>
+          </a:prstGeom>
+          <a:noFill/>
+          <a:ln/>
+        </p:spPr>
+        <p:txBody>
+          <a:bodyPr wrap="square" lIns="0" tIns="0" rIns="0" bIns="0" rtlCol="0" anchor="ctr">
+            <a:normAutofit/>
+          </a:bodyPr>
+          <a:lstStyle/>
+          <a:p>
+            <a:pPr algn="ctr" indent="0" marL="0">
+              <a:buNone/>
+            </a:pPr>
+            <a:r>
+              <a:rPr lang="en-US" sz="3600" b="1" dirty="0">
+                <a:solidFill>
+                  <a:srgbClr val="990011"/>
+                </a:solidFill>
+                <a:latin typeface="Times New Roman" pitchFamily="34" charset="0"/>
+                <a:ea typeface="Times New Roman" pitchFamily="34" charset="-122"/>
+                <a:cs typeface="Times New Roman" pitchFamily="34" charset="-120"/>
+              </a:rPr>
+              <a:t>1. Construction of a Climograph</a:t>
+            </a:r>
+            <a:endParaRPr lang="en-US" sz="3600" dirty="0"/>
+          </a:p>
+        </p:txBody>
+      </p:sp>
+      <p:sp>
+        <p:nvSpPr>
+          <p:cNvPr id="4" name="Text 2"/>
+          <p:cNvSpPr/>
+          <p:nvPr/>
+        </p:nvSpPr>
+        <p:spPr>
+          <a:xfrm>
+            <a:off x="365760" y="1783080"/>
+            <a:ext cx="4846320" cy="4617720"/>
+          </a:xfrm>
+          <a:prstGeom prst="rect">
+            <a:avLst/>
+          </a:prstGeom>
+          <a:noFill/>
+          <a:ln/>
+        </p:spPr>
+        <p:txBody>
+          <a:bodyPr wrap="square" lIns="0" tIns="0" rIns="0" bIns="0" rtlCol="0" anchor="t"/>
+          <a:lstStyle/>
+          <a:p>
+            <a:pPr algn="l" indent="0" marL="0">
+              <a:spcAft>
+                <a:spcPts val="800"/>
+              </a:spcAft>
+              <a:buNone/>
+            </a:pPr>
+            <a:r>
+              <a:rPr lang="en-US" sz="3600" i="1" dirty="0">
+                <a:solidFill>
+                  <a:srgbClr val="111111"/>
+                </a:solidFill>
+                <a:latin typeface="Times New Roman" pitchFamily="34" charset="0"/>
+                <a:ea typeface="Times New Roman" pitchFamily="34" charset="-122"/>
+                <a:cs typeface="Times New Roman" pitchFamily="34" charset="-120"/>
+              </a:rPr>
+              <a:t>We draw a climograph in the following steps:</a:t>
+            </a:r>
+            <a:endParaRPr lang="en-US" sz="3600" dirty="0"/>
+          </a:p>
+          <a:p>
+            <a:pPr algn="l" indent="0" marL="0">
+              <a:spcAft>
+                <a:spcPts val="800"/>
+              </a:spcAft>
+              <a:buNone/>
+            </a:pPr>
+            <a:r>
+              <a:rPr lang="en-US" sz="3600" b="1" dirty="0">
+                <a:solidFill>
+                  <a:srgbClr val="111111"/>
+                </a:solidFill>
+                <a:latin typeface="Times New Roman" pitchFamily="34" charset="0"/>
+                <a:ea typeface="Times New Roman" pitchFamily="34" charset="-122"/>
+                <a:cs typeface="Times New Roman" pitchFamily="34" charset="-120"/>
+              </a:rPr>
+              <a:t>Step 1: </a:t>
+            </a:r>
+            <a:pPr algn="l" indent="0" marL="0">
+              <a:spcAft>
+                <a:spcPts val="800"/>
+              </a:spcAft>
+              <a:buNone/>
+            </a:pPr>
+            <a:r>
+              <a:rPr lang="en-US" sz="3600" dirty="0">
+                <a:solidFill>
+                  <a:srgbClr val="111111"/>
+                </a:solidFill>
+                <a:latin typeface="Times New Roman" pitchFamily="34" charset="0"/>
+                <a:ea typeface="Times New Roman" pitchFamily="34" charset="-122"/>
+                <a:cs typeface="Times New Roman" pitchFamily="34" charset="-120"/>
+              </a:rPr>
+              <a:t>We collect the monthly data of a weather station, for example Garoua.</a:t>
+            </a:r>
+            <a:endParaRPr lang="en-US" sz="3600" dirty="0"/>
+          </a:p>
+        </p:txBody>
+      </p:sp>
       <p:pic>
         <p:nvPicPr>
-          <p:cNvPr id="3" name="Image 0" descr="/home/claude/f4/img/minesec_sheet.png">    </p:cNvPr>
+          <p:cNvPr id="5" name="Image 0" descr="/home/claude/f4/img/v2/garoua_data_big.png">    </p:cNvPr>
           <p:cNvPicPr>
             <a:picLocks noChangeAspect="1"/>
           </p:cNvPicPr>
@@ -13462,8 +13797,8 @@
         </p:blipFill>
         <p:spPr>
           <a:xfrm>
-            <a:off x="0" y="658368"/>
-            <a:ext cx="2468880" cy="5833872"/>
+            <a:off x="5349240" y="2617506"/>
+            <a:ext cx="6659575" cy="2601397"/>
           </a:xfrm>
           <a:prstGeom prst="rect">
             <a:avLst/>
@@ -13472,14 +13807,14 @@
       </p:pic>
       <p:sp>
         <p:nvSpPr>
-          <p:cNvPr id="4" name="Text 1"/>
+          <p:cNvPr id="6" name="Text 3"/>
           <p:cNvSpPr/>
           <p:nvPr/>
         </p:nvSpPr>
         <p:spPr>
           <a:xfrm>
-            <a:off x="2697480" y="1005840"/>
-            <a:ext cx="9174175" cy="731520"/>
+            <a:off x="5349240" y="6089904"/>
+            <a:ext cx="6659575" cy="347472"/>
           </a:xfrm>
           <a:prstGeom prst="rect">
             <a:avLst/>
@@ -13488,142 +13823,24 @@
           <a:ln/>
         </p:spPr>
         <p:txBody>
-          <a:bodyPr wrap="square" lIns="0" tIns="0" rIns="0" bIns="0" rtlCol="0" anchor="ctr">
-            <a:normAutofit/>
-          </a:bodyPr>
+          <a:bodyPr wrap="square" lIns="0" tIns="0" rIns="0" bIns="0" rtlCol="0" anchor="ctr"/>
           <a:lstStyle/>
           <a:p>
             <a:pPr algn="ctr" indent="0" marL="0">
               <a:buNone/>
             </a:pPr>
             <a:r>
-              <a:rPr lang="en-US" sz="3600" b="1" dirty="0">
-                <a:solidFill>
-                  <a:srgbClr val="990011"/>
+              <a:rPr lang="en-US" sz="1600" i="1" dirty="0">
+                <a:solidFill>
+                  <a:srgbClr val="555555"/>
                 </a:solidFill>
                 <a:latin typeface="Times New Roman" pitchFamily="34" charset="0"/>
                 <a:ea typeface="Times New Roman" pitchFamily="34" charset="-122"/>
                 <a:cs typeface="Times New Roman" pitchFamily="34" charset="-120"/>
               </a:rPr>
-              <a:t>1. Steps to Draw a Climograph</a:t>
-            </a:r>
-            <a:endParaRPr lang="en-US" sz="3600" dirty="0"/>
-          </a:p>
-        </p:txBody>
-      </p:sp>
-      <p:sp>
-        <p:nvSpPr>
-          <p:cNvPr id="5" name="Text 2"/>
-          <p:cNvSpPr/>
-          <p:nvPr/>
-        </p:nvSpPr>
-        <p:spPr>
-          <a:xfrm>
-            <a:off x="2697480" y="1783080"/>
-            <a:ext cx="9174175" cy="4663440"/>
-          </a:xfrm>
-          <a:prstGeom prst="rect">
-            <a:avLst/>
-          </a:prstGeom>
-          <a:noFill/>
-          <a:ln/>
-        </p:spPr>
-        <p:txBody>
-          <a:bodyPr wrap="square" lIns="0" tIns="0" rIns="0" bIns="0" rtlCol="0" anchor="t"/>
-          <a:lstStyle/>
-          <a:p>
-            <a:pPr algn="l" indent="0" marL="0">
-              <a:spcAft>
-                <a:spcPts val="800"/>
-              </a:spcAft>
-              <a:buNone/>
-            </a:pPr>
-            <a:r>
-              <a:rPr lang="en-US" sz="4000" i="1" dirty="0">
-                <a:solidFill>
-                  <a:srgbClr val="111111"/>
-                </a:solidFill>
-                <a:latin typeface="Times New Roman" pitchFamily="34" charset="0"/>
-                <a:ea typeface="Times New Roman" pitchFamily="34" charset="-122"/>
-                <a:cs typeface="Times New Roman" pitchFamily="34" charset="-120"/>
-              </a:rPr>
-              <a:t>We draw a climograph in the following steps:</a:t>
-            </a:r>
-            <a:endParaRPr lang="en-US" sz="4000" dirty="0"/>
-          </a:p>
-          <a:p>
-            <a:pPr algn="l" indent="0" marL="0">
-              <a:spcAft>
-                <a:spcPts val="800"/>
-              </a:spcAft>
-              <a:buNone/>
-            </a:pPr>
-            <a:r>
-              <a:rPr lang="en-US" sz="4000" b="1" dirty="0">
-                <a:solidFill>
-                  <a:srgbClr val="111111"/>
-                </a:solidFill>
-                <a:latin typeface="Times New Roman" pitchFamily="34" charset="0"/>
-                <a:ea typeface="Times New Roman" pitchFamily="34" charset="-122"/>
-                <a:cs typeface="Times New Roman" pitchFamily="34" charset="-120"/>
-              </a:rPr>
-              <a:t>Step 1: </a:t>
-            </a:r>
-            <a:pPr algn="l" indent="0" marL="0">
-              <a:spcAft>
-                <a:spcPts val="800"/>
-              </a:spcAft>
-              <a:buNone/>
-            </a:pPr>
-            <a:r>
-              <a:rPr lang="en-US" sz="4000" dirty="0">
-                <a:solidFill>
-                  <a:srgbClr val="111111"/>
-                </a:solidFill>
-                <a:latin typeface="Times New Roman" pitchFamily="34" charset="0"/>
-                <a:ea typeface="Times New Roman" pitchFamily="34" charset="-122"/>
-                <a:cs typeface="Times New Roman" pitchFamily="34" charset="-120"/>
-              </a:rPr>
-              <a:t>We draw the horizontal axis for the 12 months and two vertical axes for rainfall and temperature.</a:t>
-            </a:r>
-            <a:endParaRPr lang="en-US" sz="4000" dirty="0"/>
-          </a:p>
-          <a:p>
-            <a:pPr algn="l" indent="0" marL="0">
-              <a:spcAft>
-                <a:spcPts val="800"/>
-              </a:spcAft>
-              <a:buNone/>
-            </a:pPr>
-            <a:r>
-              <a:rPr lang="en-US" sz="4000" b="1" dirty="0">
-                <a:solidFill>
-                  <a:srgbClr val="111111"/>
-                </a:solidFill>
-                <a:latin typeface="Times New Roman" pitchFamily="34" charset="0"/>
-                <a:ea typeface="Times New Roman" pitchFamily="34" charset="-122"/>
-                <a:cs typeface="Times New Roman" pitchFamily="34" charset="-120"/>
-              </a:rPr>
-              <a:t>Step 2: </a:t>
-            </a:r>
-            <a:pPr algn="l" indent="0" marL="0">
-              <a:spcAft>
-                <a:spcPts val="800"/>
-              </a:spcAft>
-              <a:buNone/>
-            </a:pPr>
-            <a:r>
-              <a:rPr lang="en-US" sz="4000" dirty="0">
-                <a:solidFill>
-                  <a:srgbClr val="111111"/>
-                </a:solidFill>
-                <a:latin typeface="Times New Roman" pitchFamily="34" charset="0"/>
-                <a:ea typeface="Times New Roman" pitchFamily="34" charset="-122"/>
-                <a:cs typeface="Times New Roman" pitchFamily="34" charset="-120"/>
-              </a:rPr>
-              <a:t>We draw a bar for the rainfall of each month and colour it blue.</a:t>
-            </a:r>
-            <a:endParaRPr lang="en-US" sz="4000" dirty="0"/>
+              <a:t>Illustration: climate data of Garoua</a:t>
+            </a:r>
+            <a:endParaRPr lang="en-US" sz="1600" dirty="0"/>
           </a:p>
         </p:txBody>
       </p:sp>
@@ -13756,7 +13973,7 @@
         <p:spPr>
           <a:xfrm>
             <a:off x="0" y="658368"/>
-            <a:ext cx="5120640" cy="5833872"/>
+            <a:ext cx="3840480" cy="5833872"/>
           </a:xfrm>
           <a:prstGeom prst="rect">
             <a:avLst/>
@@ -13771,8 +13988,8 @@
         </p:nvSpPr>
         <p:spPr>
           <a:xfrm>
-            <a:off x="5349240" y="1005840"/>
-            <a:ext cx="6522415" cy="731520"/>
+            <a:off x="4069080" y="1005840"/>
+            <a:ext cx="7802575" cy="731520"/>
           </a:xfrm>
           <a:prstGeom prst="rect">
             <a:avLst/>
@@ -13798,7 +14015,7 @@
                 <a:ea typeface="Times New Roman" pitchFamily="34" charset="-122"/>
                 <a:cs typeface="Times New Roman" pitchFamily="34" charset="-120"/>
               </a:rPr>
-              <a:t>1. Steps to Draw a Climograph (continued)</a:t>
+              <a:t>1. Construction of a Climograph</a:t>
             </a:r>
             <a:endParaRPr lang="en-US" sz="3600" dirty="0"/>
           </a:p>
@@ -13812,8 +14029,8 @@
         </p:nvSpPr>
         <p:spPr>
           <a:xfrm>
-            <a:off x="5349240" y="1783080"/>
-            <a:ext cx="6522415" cy="4663440"/>
+            <a:off x="4069080" y="1783080"/>
+            <a:ext cx="7802575" cy="4663440"/>
           </a:xfrm>
           <a:prstGeom prst="rect">
             <a:avLst/>
@@ -13840,7 +14057,7 @@
                 <a:ea typeface="Times New Roman" pitchFamily="34" charset="-122"/>
                 <a:cs typeface="Times New Roman" pitchFamily="34" charset="-120"/>
               </a:rPr>
-              <a:t>Step 3: </a:t>
+              <a:t>Step 2: </a:t>
             </a:r>
             <a:pPr algn="l" indent="0" marL="0">
               <a:spcAft>
@@ -13857,7 +14074,7 @@
                 <a:ea typeface="Times New Roman" pitchFamily="34" charset="-122"/>
                 <a:cs typeface="Times New Roman" pitchFamily="34" charset="-120"/>
               </a:rPr>
-              <a:t>We plot the temperature of each month as a point and join the points with a red line.</a:t>
+              <a:t>We draw the horizontal axis for the 12 months and two vertical axes, one for rainfall (mm) and one for temperature (°C).</a:t>
             </a:r>
             <a:endParaRPr lang="en-US" sz="4000" dirty="0"/>
           </a:p>
@@ -13877,7 +14094,7 @@
                 <a:ea typeface="Times New Roman" pitchFamily="34" charset="-122"/>
                 <a:cs typeface="Times New Roman" pitchFamily="34" charset="-120"/>
               </a:rPr>
-              <a:t>Step 4: </a:t>
+              <a:t>Step 3: </a:t>
             </a:r>
             <a:pPr algn="l" indent="0" marL="0">
               <a:spcAft>
@@ -13894,7 +14111,7 @@
                 <a:ea typeface="Times New Roman" pitchFamily="34" charset="-122"/>
                 <a:cs typeface="Times New Roman" pitchFamily="34" charset="-120"/>
               </a:rPr>
-              <a:t>We add a title and a key.</a:t>
+              <a:t>We draw a blue bar for the rainfall of each month.</a:t>
             </a:r>
             <a:endParaRPr lang="en-US" sz="4000" dirty="0"/>
           </a:p>
@@ -14012,48 +14229,9 @@
           </a:p>
         </p:txBody>
       </p:sp>
-      <p:sp>
-        <p:nvSpPr>
-          <p:cNvPr id="3" name="Text 1"/>
-          <p:cNvSpPr/>
-          <p:nvPr/>
-        </p:nvSpPr>
-        <p:spPr>
-          <a:xfrm>
-            <a:off x="457200" y="1005840"/>
-            <a:ext cx="11277295" cy="731520"/>
-          </a:xfrm>
-          <a:prstGeom prst="rect">
-            <a:avLst/>
-          </a:prstGeom>
-          <a:noFill/>
-          <a:ln/>
-        </p:spPr>
-        <p:txBody>
-          <a:bodyPr wrap="square" lIns="0" tIns="0" rIns="0" bIns="0" rtlCol="0" anchor="ctr"/>
-          <a:lstStyle/>
-          <a:p>
-            <a:pPr algn="ctr" indent="0" marL="0">
-              <a:buNone/>
-            </a:pPr>
-            <a:r>
-              <a:rPr lang="en-US" sz="3600" b="1" dirty="0">
-                <a:solidFill>
-                  <a:srgbClr val="990011"/>
-                </a:solidFill>
-                <a:latin typeface="Times New Roman" pitchFamily="34" charset="0"/>
-                <a:ea typeface="Times New Roman" pitchFamily="34" charset="-122"/>
-                <a:cs typeface="Times New Roman" pitchFamily="34" charset="-120"/>
-              </a:rPr>
-              <a:t>1. Steps to Draw a Climograph</a:t>
-            </a:r>
-            <a:endParaRPr lang="en-US" sz="3600" dirty="0"/>
-          </a:p>
-        </p:txBody>
-      </p:sp>
       <p:pic>
         <p:nvPicPr>
-          <p:cNvPr id="4" name="Image 0" descr="/home/claude/f4/img/v2/garoua_climate_big.png">    </p:cNvPr>
+          <p:cNvPr id="3" name="Image 0" descr="/home/claude/f4/img/minesec_sheet.png">    </p:cNvPr>
           <p:cNvPicPr>
             <a:picLocks noChangeAspect="1"/>
           </p:cNvPicPr>
@@ -14067,8 +14245,8 @@
         </p:blipFill>
         <p:spPr>
           <a:xfrm>
-            <a:off x="1215564" y="1783080"/>
-            <a:ext cx="9760567" cy="4270248"/>
+            <a:off x="0" y="658368"/>
+            <a:ext cx="5120640" cy="5833872"/>
           </a:xfrm>
           <a:prstGeom prst="rect">
             <a:avLst/>
@@ -14077,14 +14255,14 @@
       </p:pic>
       <p:sp>
         <p:nvSpPr>
-          <p:cNvPr id="5" name="Text 2"/>
+          <p:cNvPr id="4" name="Text 1"/>
           <p:cNvSpPr/>
           <p:nvPr/>
         </p:nvSpPr>
         <p:spPr>
           <a:xfrm>
-            <a:off x="457200" y="6089904"/>
-            <a:ext cx="11277295" cy="347472"/>
+            <a:off x="5349240" y="1005840"/>
+            <a:ext cx="6522415" cy="731520"/>
           </a:xfrm>
           <a:prstGeom prst="rect">
             <a:avLst/>
@@ -14093,24 +14271,85 @@
           <a:ln/>
         </p:spPr>
         <p:txBody>
-          <a:bodyPr wrap="square" lIns="0" tIns="0" rIns="0" bIns="0" rtlCol="0" anchor="ctr"/>
+          <a:bodyPr wrap="square" lIns="0" tIns="0" rIns="0" bIns="0" rtlCol="0" anchor="ctr">
+            <a:normAutofit/>
+          </a:bodyPr>
           <a:lstStyle/>
           <a:p>
             <a:pPr algn="ctr" indent="0" marL="0">
               <a:buNone/>
             </a:pPr>
             <a:r>
-              <a:rPr lang="en-US" sz="1800" i="1" dirty="0">
-                <a:solidFill>
-                  <a:srgbClr val="555555"/>
+              <a:rPr lang="en-US" sz="3600" b="1" dirty="0">
+                <a:solidFill>
+                  <a:srgbClr val="990011"/>
                 </a:solidFill>
                 <a:latin typeface="Times New Roman" pitchFamily="34" charset="0"/>
                 <a:ea typeface="Times New Roman" pitchFamily="34" charset="-122"/>
                 <a:cs typeface="Times New Roman" pitchFamily="34" charset="-120"/>
               </a:rPr>
-              <a:t>Illustration: the climograph of Garoua</a:t>
-            </a:r>
-            <a:endParaRPr lang="en-US" sz="1800" dirty="0"/>
+              <a:t>1. Construction of a Climograph (continued)</a:t>
+            </a:r>
+            <a:endParaRPr lang="en-US" sz="3600" dirty="0"/>
+          </a:p>
+        </p:txBody>
+      </p:sp>
+      <p:sp>
+        <p:nvSpPr>
+          <p:cNvPr id="5" name="Text 2"/>
+          <p:cNvSpPr/>
+          <p:nvPr/>
+        </p:nvSpPr>
+        <p:spPr>
+          <a:xfrm>
+            <a:off x="5349240" y="1783080"/>
+            <a:ext cx="6522415" cy="4663440"/>
+          </a:xfrm>
+          <a:prstGeom prst="rect">
+            <a:avLst/>
+          </a:prstGeom>
+          <a:noFill/>
+          <a:ln/>
+        </p:spPr>
+        <p:txBody>
+          <a:bodyPr wrap="square" lIns="0" tIns="0" rIns="0" bIns="0" rtlCol="0" anchor="t"/>
+          <a:lstStyle/>
+          <a:p>
+            <a:pPr algn="l" indent="0" marL="0">
+              <a:spcAft>
+                <a:spcPts val="800"/>
+              </a:spcAft>
+              <a:buNone/>
+            </a:pPr>
+            <a:r>
+              <a:rPr lang="en-US" sz="4000" b="1" dirty="0">
+                <a:solidFill>
+                  <a:srgbClr val="111111"/>
+                </a:solidFill>
+                <a:latin typeface="Times New Roman" pitchFamily="34" charset="0"/>
+                <a:ea typeface="Times New Roman" pitchFamily="34" charset="-122"/>
+                <a:cs typeface="Times New Roman" pitchFamily="34" charset="-120"/>
+              </a:rPr>
+              <a:t>Step 4: </a:t>
+            </a:r>
+            <a:pPr algn="l" indent="0" marL="0">
+              <a:spcAft>
+                <a:spcPts val="800"/>
+              </a:spcAft>
+              <a:buNone/>
+            </a:pPr>
+            <a:r>
+              <a:rPr lang="en-US" sz="4000" dirty="0">
+                <a:solidFill>
+                  <a:srgbClr val="111111"/>
+                </a:solidFill>
+                <a:latin typeface="Times New Roman" pitchFamily="34" charset="0"/>
+                <a:ea typeface="Times New Roman" pitchFamily="34" charset="-122"/>
+                <a:cs typeface="Times New Roman" pitchFamily="34" charset="-120"/>
+              </a:rPr>
+              <a:t>We plot the temperature of each month as a point and join the points with a red line.</a:t>
+            </a:r>
+            <a:endParaRPr lang="en-US" sz="4000" dirty="0"/>
           </a:p>
         </p:txBody>
       </p:sp>
@@ -14226,9 +14465,109 @@
           </a:p>
         </p:txBody>
       </p:sp>
+      <p:sp>
+        <p:nvSpPr>
+          <p:cNvPr id="3" name="Text 1"/>
+          <p:cNvSpPr/>
+          <p:nvPr/>
+        </p:nvSpPr>
+        <p:spPr>
+          <a:xfrm>
+            <a:off x="365760" y="1005840"/>
+            <a:ext cx="11460175" cy="731520"/>
+          </a:xfrm>
+          <a:prstGeom prst="rect">
+            <a:avLst/>
+          </a:prstGeom>
+          <a:noFill/>
+          <a:ln/>
+        </p:spPr>
+        <p:txBody>
+          <a:bodyPr wrap="square" lIns="0" tIns="0" rIns="0" bIns="0" rtlCol="0" anchor="ctr">
+            <a:normAutofit/>
+          </a:bodyPr>
+          <a:lstStyle/>
+          <a:p>
+            <a:pPr algn="ctr" indent="0" marL="0">
+              <a:buNone/>
+            </a:pPr>
+            <a:r>
+              <a:rPr lang="en-US" sz="3600" b="1" dirty="0">
+                <a:solidFill>
+                  <a:srgbClr val="990011"/>
+                </a:solidFill>
+                <a:latin typeface="Times New Roman" pitchFamily="34" charset="0"/>
+                <a:ea typeface="Times New Roman" pitchFamily="34" charset="-122"/>
+                <a:cs typeface="Times New Roman" pitchFamily="34" charset="-120"/>
+              </a:rPr>
+              <a:t>1. Construction of a Climograph</a:t>
+            </a:r>
+            <a:endParaRPr lang="en-US" sz="3600" dirty="0"/>
+          </a:p>
+        </p:txBody>
+      </p:sp>
+      <p:sp>
+        <p:nvSpPr>
+          <p:cNvPr id="4" name="Text 2"/>
+          <p:cNvSpPr/>
+          <p:nvPr/>
+        </p:nvSpPr>
+        <p:spPr>
+          <a:xfrm>
+            <a:off x="365760" y="1783080"/>
+            <a:ext cx="4846320" cy="4617720"/>
+          </a:xfrm>
+          <a:prstGeom prst="rect">
+            <a:avLst/>
+          </a:prstGeom>
+          <a:noFill/>
+          <a:ln/>
+        </p:spPr>
+        <p:txBody>
+          <a:bodyPr wrap="square" lIns="0" tIns="0" rIns="0" bIns="0" rtlCol="0" anchor="t"/>
+          <a:lstStyle/>
+          <a:p>
+            <a:pPr algn="l" indent="0" marL="0">
+              <a:spcAft>
+                <a:spcPts val="800"/>
+              </a:spcAft>
+              <a:buNone/>
+            </a:pPr>
+            <a:r>
+              <a:rPr lang="en-US" sz="3600" b="1" dirty="0">
+                <a:solidFill>
+                  <a:srgbClr val="111111"/>
+                </a:solidFill>
+                <a:latin typeface="Times New Roman" pitchFamily="34" charset="0"/>
+                <a:ea typeface="Times New Roman" pitchFamily="34" charset="-122"/>
+                <a:cs typeface="Times New Roman" pitchFamily="34" charset="-120"/>
+              </a:rPr>
+              <a:t>Step 5: </a:t>
+            </a:r>
+            <a:pPr algn="l" indent="0" marL="0">
+              <a:spcAft>
+                <a:spcPts val="800"/>
+              </a:spcAft>
+              <a:buNone/>
+            </a:pPr>
+            <a:r>
+              <a:rPr lang="en-US" sz="3600" dirty="0">
+                <a:solidFill>
+                  <a:srgbClr val="111111"/>
+                </a:solidFill>
+                <a:latin typeface="Times New Roman" pitchFamily="34" charset="0"/>
+                <a:ea typeface="Times New Roman" pitchFamily="34" charset="-122"/>
+                <a:cs typeface="Times New Roman" pitchFamily="34" charset="-120"/>
+              </a:rPr>
+              <a:t>We add a title and a key.</a:t>
+            </a:r>
+            <a:endParaRPr lang="en-US" sz="3600" dirty="0"/>
+          </a:p>
+        </p:txBody>
+      </p:sp>
       <p:pic>
         <p:nvPicPr>
-          <p:cNvPr id="3" name="Image 0" descr="/home/claude/f4/img/minesec_sheet.png">    </p:cNvPr>
+          <p:cNvPr id="5" name="Image 0" descr="/home/claude/f4/img/v2/garoua_climate_big.png">    </p:cNvPr>
           <p:cNvPicPr>
             <a:picLocks noChangeAspect="1"/>
           </p:cNvPicPr>
@@ -14242,8 +14581,8 @@
         </p:blipFill>
         <p:spPr>
           <a:xfrm>
-            <a:off x="0" y="658368"/>
-            <a:ext cx="3840480" cy="5833872"/>
+            <a:off x="5349240" y="2461422"/>
+            <a:ext cx="6659575" cy="2913564"/>
           </a:xfrm>
           <a:prstGeom prst="rect">
             <a:avLst/>
@@ -14252,14 +14591,14 @@
       </p:pic>
       <p:sp>
         <p:nvSpPr>
-          <p:cNvPr id="4" name="Text 1"/>
+          <p:cNvPr id="6" name="Text 3"/>
           <p:cNvSpPr/>
           <p:nvPr/>
         </p:nvSpPr>
         <p:spPr>
           <a:xfrm>
-            <a:off x="4069080" y="1005840"/>
-            <a:ext cx="7802575" cy="731520"/>
+            <a:off x="5349240" y="6089904"/>
+            <a:ext cx="6659575" cy="347472"/>
           </a:xfrm>
           <a:prstGeom prst="rect">
             <a:avLst/>
@@ -14268,142 +14607,24 @@
           <a:ln/>
         </p:spPr>
         <p:txBody>
-          <a:bodyPr wrap="square" lIns="0" tIns="0" rIns="0" bIns="0" rtlCol="0" anchor="ctr">
-            <a:normAutofit/>
-          </a:bodyPr>
+          <a:bodyPr wrap="square" lIns="0" tIns="0" rIns="0" bIns="0" rtlCol="0" anchor="ctr"/>
           <a:lstStyle/>
           <a:p>
             <a:pPr algn="ctr" indent="0" marL="0">
               <a:buNone/>
             </a:pPr>
             <a:r>
-              <a:rPr lang="en-US" sz="3600" b="1" dirty="0">
-                <a:solidFill>
-                  <a:srgbClr val="990011"/>
+              <a:rPr lang="en-US" sz="1600" i="1" dirty="0">
+                <a:solidFill>
+                  <a:srgbClr val="555555"/>
                 </a:solidFill>
                 <a:latin typeface="Times New Roman" pitchFamily="34" charset="0"/>
                 <a:ea typeface="Times New Roman" pitchFamily="34" charset="-122"/>
                 <a:cs typeface="Times New Roman" pitchFamily="34" charset="-120"/>
               </a:rPr>
-              <a:t>2. Reading a Climograph</a:t>
-            </a:r>
-            <a:endParaRPr lang="en-US" sz="3600" dirty="0"/>
-          </a:p>
-        </p:txBody>
-      </p:sp>
-      <p:sp>
-        <p:nvSpPr>
-          <p:cNvPr id="5" name="Text 2"/>
-          <p:cNvSpPr/>
-          <p:nvPr/>
-        </p:nvSpPr>
-        <p:spPr>
-          <a:xfrm>
-            <a:off x="4069080" y="1783080"/>
-            <a:ext cx="7802575" cy="4663440"/>
-          </a:xfrm>
-          <a:prstGeom prst="rect">
-            <a:avLst/>
-          </a:prstGeom>
-          <a:noFill/>
-          <a:ln/>
-        </p:spPr>
-        <p:txBody>
-          <a:bodyPr wrap="square" lIns="0" tIns="0" rIns="0" bIns="0" rtlCol="0" anchor="t"/>
-          <a:lstStyle/>
-          <a:p>
-            <a:pPr algn="l" indent="0" marL="0">
-              <a:spcAft>
-                <a:spcPts val="800"/>
-              </a:spcAft>
-              <a:buNone/>
-            </a:pPr>
-            <a:r>
-              <a:rPr lang="en-US" sz="4000" i="1" dirty="0">
-                <a:solidFill>
-                  <a:srgbClr val="111111"/>
-                </a:solidFill>
-                <a:latin typeface="Times New Roman" pitchFamily="34" charset="0"/>
-                <a:ea typeface="Times New Roman" pitchFamily="34" charset="-122"/>
-                <a:cs typeface="Times New Roman" pitchFamily="34" charset="-120"/>
-              </a:rPr>
-              <a:t>We read a climograph as follows:</a:t>
-            </a:r>
-            <a:endParaRPr lang="en-US" sz="4000" dirty="0"/>
-          </a:p>
-          <a:p>
-            <a:pPr algn="l" indent="0" marL="0">
-              <a:spcAft>
-                <a:spcPts val="800"/>
-              </a:spcAft>
-              <a:buNone/>
-            </a:pPr>
-            <a:r>
-              <a:rPr lang="en-US" sz="4000" b="1" dirty="0">
-                <a:solidFill>
-                  <a:srgbClr val="111111"/>
-                </a:solidFill>
-                <a:latin typeface="Times New Roman" pitchFamily="34" charset="0"/>
-                <a:ea typeface="Times New Roman" pitchFamily="34" charset="-122"/>
-                <a:cs typeface="Times New Roman" pitchFamily="34" charset="-120"/>
-              </a:rPr>
-              <a:t>Rainfall: </a:t>
-            </a:r>
-            <a:pPr algn="l" indent="0" marL="0">
-              <a:spcAft>
-                <a:spcPts val="800"/>
-              </a:spcAft>
-              <a:buNone/>
-            </a:pPr>
-            <a:r>
-              <a:rPr lang="en-US" sz="4000" dirty="0">
-                <a:solidFill>
-                  <a:srgbClr val="111111"/>
-                </a:solidFill>
-                <a:latin typeface="Times New Roman" pitchFamily="34" charset="0"/>
-                <a:ea typeface="Times New Roman" pitchFamily="34" charset="-122"/>
-                <a:cs typeface="Times New Roman" pitchFamily="34" charset="-120"/>
-              </a:rPr>
-              <a:t>We find the wettest and driest months and the length of the rainy season.</a:t>
-            </a:r>
-            <a:endParaRPr lang="en-US" sz="4000" dirty="0"/>
-          </a:p>
-          <a:p>
-            <a:pPr algn="l" indent="0" marL="0">
-              <a:spcAft>
-                <a:spcPts val="800"/>
-              </a:spcAft>
-              <a:buNone/>
-            </a:pPr>
-            <a:r>
-              <a:rPr lang="en-US" sz="4000" b="1" dirty="0">
-                <a:solidFill>
-                  <a:srgbClr val="111111"/>
-                </a:solidFill>
-                <a:latin typeface="Times New Roman" pitchFamily="34" charset="0"/>
-                <a:ea typeface="Times New Roman" pitchFamily="34" charset="-122"/>
-                <a:cs typeface="Times New Roman" pitchFamily="34" charset="-120"/>
-              </a:rPr>
-              <a:t>Temperature: </a:t>
-            </a:r>
-            <a:pPr algn="l" indent="0" marL="0">
-              <a:spcAft>
-                <a:spcPts val="800"/>
-              </a:spcAft>
-              <a:buNone/>
-            </a:pPr>
-            <a:r>
-              <a:rPr lang="en-US" sz="4000" dirty="0">
-                <a:solidFill>
-                  <a:srgbClr val="111111"/>
-                </a:solidFill>
-                <a:latin typeface="Times New Roman" pitchFamily="34" charset="0"/>
-                <a:ea typeface="Times New Roman" pitchFamily="34" charset="-122"/>
-                <a:cs typeface="Times New Roman" pitchFamily="34" charset="-120"/>
-              </a:rPr>
-              <a:t>We find the hottest and coolest months and calculate the annual range.</a:t>
-            </a:r>
-            <a:endParaRPr lang="en-US" sz="4000" dirty="0"/>
+              <a:t>Illustration: the climograph of Garoua</a:t>
+            </a:r>
+            <a:endParaRPr lang="en-US" sz="1600" dirty="0"/>
           </a:p>
         </p:txBody>
       </p:sp>
@@ -14536,7 +14757,7 @@
         <p:spPr>
           <a:xfrm>
             <a:off x="0" y="658368"/>
-            <a:ext cx="5120640" cy="5833872"/>
+            <a:ext cx="3840480" cy="5833872"/>
           </a:xfrm>
           <a:prstGeom prst="rect">
             <a:avLst/>
@@ -14551,8 +14772,8 @@
         </p:nvSpPr>
         <p:spPr>
           <a:xfrm>
-            <a:off x="5349240" y="1005840"/>
-            <a:ext cx="6522415" cy="731520"/>
+            <a:off x="4069080" y="1005840"/>
+            <a:ext cx="7802575" cy="731520"/>
           </a:xfrm>
           <a:prstGeom prst="rect">
             <a:avLst/>
@@ -14578,7 +14799,7 @@
                 <a:ea typeface="Times New Roman" pitchFamily="34" charset="-122"/>
                 <a:cs typeface="Times New Roman" pitchFamily="34" charset="-120"/>
               </a:rPr>
-              <a:t>2. Reading a Climograph (continued)</a:t>
+              <a:t>2. Reading a Climograph</a:t>
             </a:r>
             <a:endParaRPr lang="en-US" sz="3600" dirty="0"/>
           </a:p>
@@ -14592,8 +14813,8 @@
         </p:nvSpPr>
         <p:spPr>
           <a:xfrm>
-            <a:off x="5349240" y="1783080"/>
-            <a:ext cx="6522415" cy="4663440"/>
+            <a:off x="4069080" y="1783080"/>
+            <a:ext cx="7802575" cy="4663440"/>
           </a:xfrm>
           <a:prstGeom prst="rect">
             <a:avLst/>
@@ -14612,7 +14833,7 @@
               <a:buNone/>
             </a:pPr>
             <a:r>
-              <a:rPr lang="en-US" sz="4000" b="1" dirty="0">
+              <a:rPr lang="en-US" sz="4000" i="1" dirty="0">
                 <a:solidFill>
                   <a:srgbClr val="111111"/>
                 </a:solidFill>
@@ -14620,8 +14841,11 @@
                 <a:ea typeface="Times New Roman" pitchFamily="34" charset="-122"/>
                 <a:cs typeface="Times New Roman" pitchFamily="34" charset="-120"/>
               </a:rPr>
-              <a:t>Conclusion: </a:t>
-            </a:r>
+              <a:t>We read a climograph as follows:</a:t>
+            </a:r>
+            <a:endParaRPr lang="en-US" sz="4000" dirty="0"/>
+          </a:p>
+          <a:p>
             <a:pPr algn="l" indent="0" marL="0">
               <a:spcAft>
                 <a:spcPts val="800"/>
@@ -14629,7 +14853,7 @@
               <a:buNone/>
             </a:pPr>
             <a:r>
-              <a:rPr lang="en-US" sz="4000" dirty="0">
+              <a:rPr lang="en-US" sz="4000" b="1" dirty="0">
                 <a:solidFill>
                   <a:srgbClr val="111111"/>
                 </a:solidFill>
@@ -14637,7 +14861,61 @@
                 <a:ea typeface="Times New Roman" pitchFamily="34" charset="-122"/>
                 <a:cs typeface="Times New Roman" pitchFamily="34" charset="-120"/>
               </a:rPr>
-              <a:t>We name the type of climate, for example the tropical climate of Garoua.</a:t>
+              <a:t>Rainfall: </a:t>
+            </a:r>
+            <a:pPr algn="l" indent="0" marL="0">
+              <a:spcAft>
+                <a:spcPts val="800"/>
+              </a:spcAft>
+              <a:buNone/>
+            </a:pPr>
+            <a:r>
+              <a:rPr lang="en-US" sz="4000" dirty="0">
+                <a:solidFill>
+                  <a:srgbClr val="111111"/>
+                </a:solidFill>
+                <a:latin typeface="Times New Roman" pitchFamily="34" charset="0"/>
+                <a:ea typeface="Times New Roman" pitchFamily="34" charset="-122"/>
+                <a:cs typeface="Times New Roman" pitchFamily="34" charset="-120"/>
+              </a:rPr>
+              <a:t>We find the wettest and driest months and the length of the rainy season.</a:t>
+            </a:r>
+            <a:endParaRPr lang="en-US" sz="4000" dirty="0"/>
+          </a:p>
+          <a:p>
+            <a:pPr algn="l" indent="0" marL="0">
+              <a:spcAft>
+                <a:spcPts val="800"/>
+              </a:spcAft>
+              <a:buNone/>
+            </a:pPr>
+            <a:r>
+              <a:rPr lang="en-US" sz="4000" b="1" dirty="0">
+                <a:solidFill>
+                  <a:srgbClr val="111111"/>
+                </a:solidFill>
+                <a:latin typeface="Times New Roman" pitchFamily="34" charset="0"/>
+                <a:ea typeface="Times New Roman" pitchFamily="34" charset="-122"/>
+                <a:cs typeface="Times New Roman" pitchFamily="34" charset="-120"/>
+              </a:rPr>
+              <a:t>Temperature: </a:t>
+            </a:r>
+            <a:pPr algn="l" indent="0" marL="0">
+              <a:spcAft>
+                <a:spcPts val="800"/>
+              </a:spcAft>
+              <a:buNone/>
+            </a:pPr>
+            <a:r>
+              <a:rPr lang="en-US" sz="4000" dirty="0">
+                <a:solidFill>
+                  <a:srgbClr val="111111"/>
+                </a:solidFill>
+                <a:latin typeface="Times New Roman" pitchFamily="34" charset="0"/>
+                <a:ea typeface="Times New Roman" pitchFamily="34" charset="-122"/>
+                <a:cs typeface="Times New Roman" pitchFamily="34" charset="-120"/>
+              </a:rPr>
+              <a:t>We find the hottest and coolest months and calculate the annual range.</a:t>
             </a:r>
             <a:endParaRPr lang="en-US" sz="4000" dirty="0"/>
           </a:p>
@@ -14988,7 +15266,7 @@
                 <a:ea typeface="Calibri" pitchFamily="34" charset="-122"/>
                 <a:cs typeface="Calibri" pitchFamily="34" charset="-120"/>
               </a:rPr>
-              <a:t>FORMATIVE EVALUATION</a:t>
+              <a:t>BOARD SUMMARY</a:t>
             </a:r>
             <a:endParaRPr lang="en-US" sz="1400" dirty="0"/>
           </a:p>
@@ -15053,7 +15331,7 @@
                 <a:ea typeface="Times New Roman" pitchFamily="34" charset="-122"/>
                 <a:cs typeface="Times New Roman" pitchFamily="34" charset="-120"/>
               </a:rPr>
-              <a:t>Evaluation 1</a:t>
+              <a:t>2. Reading a Climograph (continued)</a:t>
             </a:r>
             <a:endParaRPr lang="en-US" sz="3600" dirty="0"/>
           </a:p>
@@ -15087,7 +15365,7 @@
               <a:buNone/>
             </a:pPr>
             <a:r>
-              <a:rPr lang="en-US" sz="4000" dirty="0">
+              <a:rPr lang="en-US" sz="4000" b="1" dirty="0">
                 <a:solidFill>
                   <a:srgbClr val="111111"/>
                 </a:solidFill>
@@ -15095,7 +15373,24 @@
                 <a:ea typeface="Times New Roman" pitchFamily="34" charset="-122"/>
                 <a:cs typeface="Times New Roman" pitchFamily="34" charset="-120"/>
               </a:rPr>
-              <a:t>What two elements does a climograph show?</a:t>
+              <a:t>Type of climate: </a:t>
+            </a:r>
+            <a:pPr algn="l" indent="0" marL="0">
+              <a:spcAft>
+                <a:spcPts val="800"/>
+              </a:spcAft>
+              <a:buNone/>
+            </a:pPr>
+            <a:r>
+              <a:rPr lang="en-US" sz="4000" dirty="0">
+                <a:solidFill>
+                  <a:srgbClr val="111111"/>
+                </a:solidFill>
+                <a:latin typeface="Times New Roman" pitchFamily="34" charset="0"/>
+                <a:ea typeface="Times New Roman" pitchFamily="34" charset="-122"/>
+                <a:cs typeface="Times New Roman" pitchFamily="34" charset="-120"/>
+              </a:rPr>
+              <a:t>We name the type of climate, for example the tropical climate of Garoua.</a:t>
             </a:r>
             <a:endParaRPr lang="en-US" sz="4000" dirty="0"/>
           </a:p>
@@ -15207,15 +15502,115 @@
                 <a:ea typeface="Calibri" pitchFamily="34" charset="-122"/>
                 <a:cs typeface="Calibri" pitchFamily="34" charset="-120"/>
               </a:rPr>
-              <a:t>FORMATIVE EVALUATION</a:t>
+              <a:t>BOARD SUMMARY</a:t>
             </a:r>
             <a:endParaRPr lang="en-US" sz="1400" dirty="0"/>
+          </a:p>
+        </p:txBody>
+      </p:sp>
+      <p:sp>
+        <p:nvSpPr>
+          <p:cNvPr id="3" name="Text 1"/>
+          <p:cNvSpPr/>
+          <p:nvPr/>
+        </p:nvSpPr>
+        <p:spPr>
+          <a:xfrm>
+            <a:off x="365760" y="1005840"/>
+            <a:ext cx="11460175" cy="731520"/>
+          </a:xfrm>
+          <a:prstGeom prst="rect">
+            <a:avLst/>
+          </a:prstGeom>
+          <a:noFill/>
+          <a:ln/>
+        </p:spPr>
+        <p:txBody>
+          <a:bodyPr wrap="square" lIns="0" tIns="0" rIns="0" bIns="0" rtlCol="0" anchor="ctr">
+            <a:normAutofit/>
+          </a:bodyPr>
+          <a:lstStyle/>
+          <a:p>
+            <a:pPr algn="ctr" indent="0" marL="0">
+              <a:buNone/>
+            </a:pPr>
+            <a:r>
+              <a:rPr lang="en-US" sz="3600" b="1" dirty="0">
+                <a:solidFill>
+                  <a:srgbClr val="990011"/>
+                </a:solidFill>
+                <a:latin typeface="Times New Roman" pitchFamily="34" charset="0"/>
+                <a:ea typeface="Times New Roman" pitchFamily="34" charset="-122"/>
+                <a:cs typeface="Times New Roman" pitchFamily="34" charset="-120"/>
+              </a:rPr>
+              <a:t>2. Reading a Climograph</a:t>
+            </a:r>
+            <a:endParaRPr lang="en-US" sz="3600" dirty="0"/>
+          </a:p>
+        </p:txBody>
+      </p:sp>
+      <p:sp>
+        <p:nvSpPr>
+          <p:cNvPr id="4" name="Text 2"/>
+          <p:cNvSpPr/>
+          <p:nvPr/>
+        </p:nvSpPr>
+        <p:spPr>
+          <a:xfrm>
+            <a:off x="365760" y="1783080"/>
+            <a:ext cx="4846320" cy="4617720"/>
+          </a:xfrm>
+          <a:prstGeom prst="rect">
+            <a:avLst/>
+          </a:prstGeom>
+          <a:noFill/>
+          <a:ln/>
+        </p:spPr>
+        <p:txBody>
+          <a:bodyPr wrap="square" lIns="0" tIns="0" rIns="0" bIns="0" rtlCol="0" anchor="t"/>
+          <a:lstStyle/>
+          <a:p>
+            <a:pPr algn="l" indent="0" marL="0">
+              <a:spcAft>
+                <a:spcPts val="800"/>
+              </a:spcAft>
+              <a:buNone/>
+            </a:pPr>
+            <a:r>
+              <a:rPr lang="en-US" sz="3600" b="1" dirty="0">
+                <a:solidFill>
+                  <a:srgbClr val="111111"/>
+                </a:solidFill>
+                <a:latin typeface="Times New Roman" pitchFamily="34" charset="0"/>
+                <a:ea typeface="Times New Roman" pitchFamily="34" charset="-122"/>
+                <a:cs typeface="Times New Roman" pitchFamily="34" charset="-120"/>
+              </a:rPr>
+              <a:t>Interpretation: </a:t>
+            </a:r>
+            <a:pPr algn="l" indent="0" marL="0">
+              <a:spcAft>
+                <a:spcPts val="800"/>
+              </a:spcAft>
+              <a:buNone/>
+            </a:pPr>
+            <a:r>
+              <a:rPr lang="en-US" sz="3600" dirty="0">
+                <a:solidFill>
+                  <a:srgbClr val="111111"/>
+                </a:solidFill>
+                <a:latin typeface="Times New Roman" pitchFamily="34" charset="0"/>
+                <a:ea typeface="Times New Roman" pitchFamily="34" charset="-122"/>
+                <a:cs typeface="Times New Roman" pitchFamily="34" charset="-120"/>
+              </a:rPr>
+              <a:t>Garoua has one rainy season from May to October and a hot dry season: it has a tropical climate.</a:t>
+            </a:r>
+            <a:endParaRPr lang="en-US" sz="3600" dirty="0"/>
           </a:p>
         </p:txBody>
       </p:sp>
       <p:pic>
         <p:nvPicPr>
-          <p:cNvPr id="3" name="Image 0" descr="/home/claude/f4/img/minesec_sheet.png">    </p:cNvPr>
+          <p:cNvPr id="5" name="Image 0" descr="/home/claude/f4/img/v2/garoua_climate_big.png">    </p:cNvPr>
           <p:cNvPicPr>
             <a:picLocks noChangeAspect="1"/>
           </p:cNvPicPr>
@@ -15229,8 +15624,8 @@
         </p:blipFill>
         <p:spPr>
           <a:xfrm>
-            <a:off x="0" y="658368"/>
-            <a:ext cx="5120640" cy="5833872"/>
+            <a:off x="5349240" y="2461422"/>
+            <a:ext cx="6659575" cy="2913564"/>
           </a:xfrm>
           <a:prstGeom prst="rect">
             <a:avLst/>
@@ -15239,14 +15634,14 @@
       </p:pic>
       <p:sp>
         <p:nvSpPr>
-          <p:cNvPr id="4" name="Text 1"/>
+          <p:cNvPr id="6" name="Text 3"/>
           <p:cNvSpPr/>
           <p:nvPr/>
         </p:nvSpPr>
         <p:spPr>
           <a:xfrm>
-            <a:off x="5349240" y="1005840"/>
-            <a:ext cx="6522415" cy="731520"/>
+            <a:off x="5349240" y="6089904"/>
+            <a:ext cx="6659575" cy="347472"/>
           </a:xfrm>
           <a:prstGeom prst="rect">
             <a:avLst/>
@@ -15255,68 +15650,24 @@
           <a:ln/>
         </p:spPr>
         <p:txBody>
-          <a:bodyPr wrap="square" lIns="0" tIns="0" rIns="0" bIns="0" rtlCol="0" anchor="ctr">
-            <a:normAutofit/>
-          </a:bodyPr>
+          <a:bodyPr wrap="square" lIns="0" tIns="0" rIns="0" bIns="0" rtlCol="0" anchor="ctr"/>
           <a:lstStyle/>
           <a:p>
             <a:pPr algn="ctr" indent="0" marL="0">
               <a:buNone/>
             </a:pPr>
             <a:r>
-              <a:rPr lang="en-US" sz="3600" b="1" dirty="0">
-                <a:solidFill>
-                  <a:srgbClr val="990011"/>
+              <a:rPr lang="en-US" sz="1600" i="1" dirty="0">
+                <a:solidFill>
+                  <a:srgbClr val="555555"/>
                 </a:solidFill>
                 <a:latin typeface="Times New Roman" pitchFamily="34" charset="0"/>
                 <a:ea typeface="Times New Roman" pitchFamily="34" charset="-122"/>
                 <a:cs typeface="Times New Roman" pitchFamily="34" charset="-120"/>
               </a:rPr>
-              <a:t>Expected Answer</a:t>
-            </a:r>
-            <a:endParaRPr lang="en-US" sz="3600" dirty="0"/>
-          </a:p>
-        </p:txBody>
-      </p:sp>
-      <p:sp>
-        <p:nvSpPr>
-          <p:cNvPr id="5" name="Text 2"/>
-          <p:cNvSpPr/>
-          <p:nvPr/>
-        </p:nvSpPr>
-        <p:spPr>
-          <a:xfrm>
-            <a:off x="5349240" y="1783080"/>
-            <a:ext cx="6522415" cy="4663440"/>
-          </a:xfrm>
-          <a:prstGeom prst="rect">
-            <a:avLst/>
-          </a:prstGeom>
-          <a:noFill/>
-          <a:ln/>
-        </p:spPr>
-        <p:txBody>
-          <a:bodyPr wrap="square" lIns="0" tIns="0" rIns="0" bIns="0" rtlCol="0" anchor="t"/>
-          <a:lstStyle/>
-          <a:p>
-            <a:pPr algn="l" indent="0" marL="0">
-              <a:spcAft>
-                <a:spcPts val="800"/>
-              </a:spcAft>
-              <a:buNone/>
-            </a:pPr>
-            <a:r>
-              <a:rPr lang="en-US" sz="4000" dirty="0">
-                <a:solidFill>
-                  <a:srgbClr val="111111"/>
-                </a:solidFill>
-                <a:latin typeface="Times New Roman" pitchFamily="34" charset="0"/>
-                <a:ea typeface="Times New Roman" pitchFamily="34" charset="-122"/>
-                <a:cs typeface="Times New Roman" pitchFamily="34" charset="-120"/>
-              </a:rPr>
-              <a:t>Temperature and rainfall.</a:t>
-            </a:r>
-            <a:endParaRPr lang="en-US" sz="4000" dirty="0"/>
+              <a:t>Illustration: the climograph of Garoua</a:t>
+            </a:r>
+            <a:endParaRPr lang="en-US" sz="1600" dirty="0"/>
           </a:p>
         </p:txBody>
       </p:sp>
@@ -15491,7 +15842,7 @@
                 <a:ea typeface="Times New Roman" pitchFamily="34" charset="-122"/>
                 <a:cs typeface="Times New Roman" pitchFamily="34" charset="-120"/>
               </a:rPr>
-              <a:t>Evaluation 2</a:t>
+              <a:t>Evaluation 1</a:t>
             </a:r>
             <a:endParaRPr lang="en-US" sz="3600" dirty="0"/>
           </a:p>
@@ -15533,7 +15884,7 @@
                 <a:ea typeface="Times New Roman" pitchFamily="34" charset="-122"/>
                 <a:cs typeface="Times New Roman" pitchFamily="34" charset="-120"/>
               </a:rPr>
-              <a:t>The hottest month is 33 °C and the coolest 26 °C. Find the annual range.</a:t>
+              <a:t>What two elements does a climograph show?</a:t>
             </a:r>
             <a:endParaRPr lang="en-US" sz="4000" dirty="0"/>
           </a:p>
@@ -15752,7 +16103,7 @@
                 <a:ea typeface="Times New Roman" pitchFamily="34" charset="-122"/>
                 <a:cs typeface="Times New Roman" pitchFamily="34" charset="-120"/>
               </a:rPr>
-              <a:t>33 − 26 = 7 °C.</a:t>
+              <a:t>Temperature and rainfall.</a:t>
             </a:r>
             <a:endParaRPr lang="en-US" sz="4000" dirty="0"/>
           </a:p>
@@ -15864,7 +16215,7 @@
                 <a:ea typeface="Calibri" pitchFamily="34" charset="-122"/>
                 <a:cs typeface="Calibri" pitchFamily="34" charset="-120"/>
               </a:rPr>
-              <a:t>REMEDIATION</a:t>
+              <a:t>FORMATIVE EVALUATION</a:t>
             </a:r>
             <a:endParaRPr lang="en-US" sz="1400" dirty="0"/>
           </a:p>
@@ -15887,7 +16238,7 @@
         <p:spPr>
           <a:xfrm>
             <a:off x="0" y="658368"/>
-            <a:ext cx="2468880" cy="5833872"/>
+            <a:ext cx="5120640" cy="5833872"/>
           </a:xfrm>
           <a:prstGeom prst="rect">
             <a:avLst/>
@@ -15902,8 +16253,8 @@
         </p:nvSpPr>
         <p:spPr>
           <a:xfrm>
-            <a:off x="2697480" y="1005840"/>
-            <a:ext cx="9174175" cy="731520"/>
+            <a:off x="5349240" y="1005840"/>
+            <a:ext cx="6522415" cy="731520"/>
           </a:xfrm>
           <a:prstGeom prst="rect">
             <a:avLst/>
@@ -15929,7 +16280,7 @@
                 <a:ea typeface="Times New Roman" pitchFamily="34" charset="-122"/>
                 <a:cs typeface="Times New Roman" pitchFamily="34" charset="-120"/>
               </a:rPr>
-              <a:t>Remediation</a:t>
+              <a:t>Evaluation 2</a:t>
             </a:r>
             <a:endParaRPr lang="en-US" sz="3600" dirty="0"/>
           </a:p>
@@ -15943,8 +16294,8 @@
         </p:nvSpPr>
         <p:spPr>
           <a:xfrm>
-            <a:off x="2697480" y="1783080"/>
-            <a:ext cx="9174175" cy="4663440"/>
+            <a:off x="5349240" y="1783080"/>
+            <a:ext cx="6522415" cy="4663440"/>
           </a:xfrm>
           <a:prstGeom prst="rect">
             <a:avLst/>
@@ -15963,7 +16314,7 @@
               <a:buNone/>
             </a:pPr>
             <a:r>
-              <a:rPr lang="en-US" sz="4000" b="1" dirty="0">
+              <a:rPr lang="en-US" sz="4000" dirty="0">
                 <a:solidFill>
                   <a:srgbClr val="111111"/>
                 </a:solidFill>
@@ -15971,73 +16322,7 @@
                 <a:ea typeface="Times New Roman" pitchFamily="34" charset="-122"/>
                 <a:cs typeface="Times New Roman" pitchFamily="34" charset="-120"/>
               </a:rPr>
-              <a:t>Fill in the blanks:</a:t>
-            </a:r>
-            <a:endParaRPr lang="en-US" sz="4000" dirty="0"/>
-          </a:p>
-          <a:p>
-            <a:pPr algn="l" marL="342900" indent="-342900">
-              <a:spcAft>
-                <a:spcPts val="800"/>
-              </a:spcAft>
-              <a:buSzPct val="100000"/>
-              <a:buFont typeface="+mj-lt"/>
-              <a:buAutoNum type="arabicPeriod" startAt="1"/>
-            </a:pPr>
-            <a:r>
-              <a:rPr lang="en-US" sz="4000" dirty="0">
-                <a:solidFill>
-                  <a:srgbClr val="111111"/>
-                </a:solidFill>
-                <a:latin typeface="Times New Roman" pitchFamily="34" charset="0"/>
-                <a:ea typeface="Times New Roman" pitchFamily="34" charset="-122"/>
-                <a:cs typeface="Times New Roman" pitchFamily="34" charset="-120"/>
-              </a:rPr>
-              <a:t>Rainfall is shown by ______ on a climograph.</a:t>
-            </a:r>
-            <a:endParaRPr lang="en-US" sz="4000" dirty="0"/>
-          </a:p>
-          <a:p>
-            <a:pPr algn="l" marL="342900" indent="-342900">
-              <a:spcAft>
-                <a:spcPts val="800"/>
-              </a:spcAft>
-              <a:buSzPct val="100000"/>
-              <a:buFont typeface="+mj-lt"/>
-              <a:buAutoNum type="arabicPeriod" startAt="1"/>
-            </a:pPr>
-            <a:r>
-              <a:rPr lang="en-US" sz="4000" dirty="0">
-                <a:solidFill>
-                  <a:srgbClr val="111111"/>
-                </a:solidFill>
-                <a:latin typeface="Times New Roman" pitchFamily="34" charset="0"/>
-                <a:ea typeface="Times New Roman" pitchFamily="34" charset="-122"/>
-                <a:cs typeface="Times New Roman" pitchFamily="34" charset="-120"/>
-              </a:rPr>
-              <a:t>Temperature is shown by a ______.</a:t>
-            </a:r>
-            <a:endParaRPr lang="en-US" sz="4000" dirty="0"/>
-          </a:p>
-          <a:p>
-            <a:pPr algn="l" marL="342900" indent="-342900">
-              <a:spcAft>
-                <a:spcPts val="800"/>
-              </a:spcAft>
-              <a:buSzPct val="100000"/>
-              <a:buFont typeface="+mj-lt"/>
-              <a:buAutoNum type="arabicPeriod" startAt="1"/>
-            </a:pPr>
-            <a:r>
-              <a:rPr lang="en-US" sz="4000" dirty="0">
-                <a:solidFill>
-                  <a:srgbClr val="111111"/>
-                </a:solidFill>
-                <a:latin typeface="Times New Roman" pitchFamily="34" charset="0"/>
-                <a:ea typeface="Times New Roman" pitchFamily="34" charset="-122"/>
-                <a:cs typeface="Times New Roman" pitchFamily="34" charset="-120"/>
-              </a:rPr>
-              <a:t>The difference between the hottest and coolest month is the annual ______.</a:t>
+              <a:t>The hottest month is 33 °C and the coolest 26 °C. Find the annual range.</a:t>
             </a:r>
             <a:endParaRPr lang="en-US" sz="4000" dirty="0"/>
           </a:p>
@@ -16149,7 +16434,7 @@
                 <a:ea typeface="Calibri" pitchFamily="34" charset="-122"/>
                 <a:cs typeface="Calibri" pitchFamily="34" charset="-120"/>
               </a:rPr>
-              <a:t>HOMEWORK</a:t>
+              <a:t>FORMATIVE EVALUATION</a:t>
             </a:r>
             <a:endParaRPr lang="en-US" sz="1400" dirty="0"/>
           </a:p>
@@ -16214,7 +16499,7 @@
                 <a:ea typeface="Times New Roman" pitchFamily="34" charset="-122"/>
                 <a:cs typeface="Times New Roman" pitchFamily="34" charset="-120"/>
               </a:rPr>
-              <a:t>Homework</a:t>
+              <a:t>Expected Answer</a:t>
             </a:r>
             <a:endParaRPr lang="en-US" sz="3600" dirty="0"/>
           </a:p>
@@ -16256,7 +16541,7 @@
                 <a:ea typeface="Times New Roman" pitchFamily="34" charset="-122"/>
                 <a:cs typeface="Times New Roman" pitchFamily="34" charset="-120"/>
               </a:rPr>
-              <a:t>Draw the climograph of Garoua using the data given in class.</a:t>
+              <a:t>33 − 26 = 7 °C.</a:t>
             </a:r>
             <a:endParaRPr lang="en-US" sz="4000" dirty="0"/>
           </a:p>
@@ -16368,7 +16653,7 @@
                 <a:ea typeface="Calibri" pitchFamily="34" charset="-122"/>
                 <a:cs typeface="Calibri" pitchFamily="34" charset="-120"/>
               </a:rPr>
-              <a:t>NEXT LESSON</a:t>
+              <a:t>REMEDIATION</a:t>
             </a:r>
             <a:endParaRPr lang="en-US" sz="1400" dirty="0"/>
           </a:p>
@@ -16391,7 +16676,7 @@
         <p:spPr>
           <a:xfrm>
             <a:off x="0" y="658368"/>
-            <a:ext cx="5120640" cy="5833872"/>
+            <a:ext cx="2468880" cy="5833872"/>
           </a:xfrm>
           <a:prstGeom prst="rect">
             <a:avLst/>
@@ -16406,8 +16691,8 @@
         </p:nvSpPr>
         <p:spPr>
           <a:xfrm>
-            <a:off x="5349240" y="1005840"/>
-            <a:ext cx="6522415" cy="731520"/>
+            <a:off x="2697480" y="1005840"/>
+            <a:ext cx="9174175" cy="731520"/>
           </a:xfrm>
           <a:prstGeom prst="rect">
             <a:avLst/>
@@ -16433,7 +16718,7 @@
                 <a:ea typeface="Times New Roman" pitchFamily="34" charset="-122"/>
                 <a:cs typeface="Times New Roman" pitchFamily="34" charset="-120"/>
               </a:rPr>
-              <a:t>Next Lesson</a:t>
+              <a:t>Remediation</a:t>
             </a:r>
             <a:endParaRPr lang="en-US" sz="3600" dirty="0"/>
           </a:p>
@@ -16447,8 +16732,8 @@
         </p:nvSpPr>
         <p:spPr>
           <a:xfrm>
-            <a:off x="5349240" y="1783080"/>
-            <a:ext cx="6522415" cy="4663440"/>
+            <a:off x="2697480" y="1783080"/>
+            <a:ext cx="9174175" cy="4663440"/>
           </a:xfrm>
           <a:prstGeom prst="rect">
             <a:avLst/>
@@ -16457,10 +16742,10 @@
           <a:ln/>
         </p:spPr>
         <p:txBody>
-          <a:bodyPr wrap="square" lIns="0" tIns="0" rIns="0" bIns="0" rtlCol="0" anchor="ctr"/>
-          <a:lstStyle/>
-          <a:p>
-            <a:pPr algn="ctr" indent="0" marL="0">
+          <a:bodyPr wrap="square" lIns="0" tIns="0" rIns="0" bIns="0" rtlCol="0" anchor="t"/>
+          <a:lstStyle/>
+          <a:p>
+            <a:pPr algn="l" indent="0" marL="0">
               <a:spcAft>
                 <a:spcPts val="800"/>
               </a:spcAft>
@@ -16475,27 +16760,73 @@
                 <a:ea typeface="Times New Roman" pitchFamily="34" charset="-122"/>
                 <a:cs typeface="Times New Roman" pitchFamily="34" charset="-120"/>
               </a:rPr>
-              <a:t>Our next lesson will be on:</a:t>
+              <a:t>Fill in the blanks:</a:t>
             </a:r>
             <a:endParaRPr lang="en-US" sz="4000" dirty="0"/>
           </a:p>
           <a:p>
-            <a:pPr algn="ctr" indent="0" marL="0">
+            <a:pPr algn="l" marL="342900" indent="-342900">
               <a:spcAft>
                 <a:spcPts val="800"/>
               </a:spcAft>
-              <a:buNone/>
+              <a:buSzPct val="100000"/>
+              <a:buFont typeface="+mj-lt"/>
+              <a:buAutoNum type="arabicPeriod" startAt="1"/>
             </a:pPr>
             <a:r>
-              <a:rPr lang="en-US" sz="4000" b="1" dirty="0">
-                <a:solidFill>
-                  <a:srgbClr val="990011"/>
+              <a:rPr lang="en-US" sz="4000" dirty="0">
+                <a:solidFill>
+                  <a:srgbClr val="111111"/>
                 </a:solidFill>
                 <a:latin typeface="Times New Roman" pitchFamily="34" charset="0"/>
                 <a:ea typeface="Times New Roman" pitchFamily="34" charset="-122"/>
                 <a:cs typeface="Times New Roman" pitchFamily="34" charset="-120"/>
               </a:rPr>
-              <a:t>Lesson 6: Forms of Degradation of the Natural Regions of Cameroon</a:t>
+              <a:t>Rainfall is shown by ______ on a climograph.</a:t>
+            </a:r>
+            <a:endParaRPr lang="en-US" sz="4000" dirty="0"/>
+          </a:p>
+          <a:p>
+            <a:pPr algn="l" marL="342900" indent="-342900">
+              <a:spcAft>
+                <a:spcPts val="800"/>
+              </a:spcAft>
+              <a:buSzPct val="100000"/>
+              <a:buFont typeface="+mj-lt"/>
+              <a:buAutoNum type="arabicPeriod" startAt="1"/>
+            </a:pPr>
+            <a:r>
+              <a:rPr lang="en-US" sz="4000" dirty="0">
+                <a:solidFill>
+                  <a:srgbClr val="111111"/>
+                </a:solidFill>
+                <a:latin typeface="Times New Roman" pitchFamily="34" charset="0"/>
+                <a:ea typeface="Times New Roman" pitchFamily="34" charset="-122"/>
+                <a:cs typeface="Times New Roman" pitchFamily="34" charset="-120"/>
+              </a:rPr>
+              <a:t>Temperature is shown by a ______.</a:t>
+            </a:r>
+            <a:endParaRPr lang="en-US" sz="4000" dirty="0"/>
+          </a:p>
+          <a:p>
+            <a:pPr algn="l" marL="342900" indent="-342900">
+              <a:spcAft>
+                <a:spcPts val="800"/>
+              </a:spcAft>
+              <a:buSzPct val="100000"/>
+              <a:buFont typeface="+mj-lt"/>
+              <a:buAutoNum type="arabicPeriod" startAt="1"/>
+            </a:pPr>
+            <a:r>
+              <a:rPr lang="en-US" sz="4000" dirty="0">
+                <a:solidFill>
+                  <a:srgbClr val="111111"/>
+                </a:solidFill>
+                <a:latin typeface="Times New Roman" pitchFamily="34" charset="0"/>
+                <a:ea typeface="Times New Roman" pitchFamily="34" charset="-122"/>
+                <a:cs typeface="Times New Roman" pitchFamily="34" charset="-120"/>
+              </a:rPr>
+              <a:t>The difference between the hottest and coolest month is the annual ______.</a:t>
             </a:r>
             <a:endParaRPr lang="en-US" sz="4000" dirty="0"/>
           </a:p>
@@ -16607,6 +16938,464 @@
                 <a:ea typeface="Calibri" pitchFamily="34" charset="-122"/>
                 <a:cs typeface="Calibri" pitchFamily="34" charset="-120"/>
               </a:rPr>
+              <a:t>HOMEWORK</a:t>
+            </a:r>
+            <a:endParaRPr lang="en-US" sz="1400" dirty="0"/>
+          </a:p>
+        </p:txBody>
+      </p:sp>
+      <p:pic>
+        <p:nvPicPr>
+          <p:cNvPr id="3" name="Image 0" descr="/home/claude/f4/img/minesec_sheet.png">    </p:cNvPr>
+          <p:cNvPicPr>
+            <a:picLocks noChangeAspect="1"/>
+          </p:cNvPicPr>
+          <p:nvPr/>
+        </p:nvPicPr>
+        <p:blipFill>
+          <a:blip r:embed="rId1"/>
+          <a:stretch>
+            <a:fillRect/>
+          </a:stretch>
+        </p:blipFill>
+        <p:spPr>
+          <a:xfrm>
+            <a:off x="0" y="658368"/>
+            <a:ext cx="5120640" cy="5833872"/>
+          </a:xfrm>
+          <a:prstGeom prst="rect">
+            <a:avLst/>
+          </a:prstGeom>
+        </p:spPr>
+      </p:pic>
+      <p:sp>
+        <p:nvSpPr>
+          <p:cNvPr id="4" name="Text 1"/>
+          <p:cNvSpPr/>
+          <p:nvPr/>
+        </p:nvSpPr>
+        <p:spPr>
+          <a:xfrm>
+            <a:off x="5349240" y="1005840"/>
+            <a:ext cx="6522415" cy="731520"/>
+          </a:xfrm>
+          <a:prstGeom prst="rect">
+            <a:avLst/>
+          </a:prstGeom>
+          <a:noFill/>
+          <a:ln/>
+        </p:spPr>
+        <p:txBody>
+          <a:bodyPr wrap="square" lIns="0" tIns="0" rIns="0" bIns="0" rtlCol="0" anchor="ctr">
+            <a:normAutofit/>
+          </a:bodyPr>
+          <a:lstStyle/>
+          <a:p>
+            <a:pPr algn="ctr" indent="0" marL="0">
+              <a:buNone/>
+            </a:pPr>
+            <a:r>
+              <a:rPr lang="en-US" sz="3600" b="1" dirty="0">
+                <a:solidFill>
+                  <a:srgbClr val="990011"/>
+                </a:solidFill>
+                <a:latin typeface="Times New Roman" pitchFamily="34" charset="0"/>
+                <a:ea typeface="Times New Roman" pitchFamily="34" charset="-122"/>
+                <a:cs typeface="Times New Roman" pitchFamily="34" charset="-120"/>
+              </a:rPr>
+              <a:t>Homework</a:t>
+            </a:r>
+            <a:endParaRPr lang="en-US" sz="3600" dirty="0"/>
+          </a:p>
+        </p:txBody>
+      </p:sp>
+      <p:sp>
+        <p:nvSpPr>
+          <p:cNvPr id="5" name="Text 2"/>
+          <p:cNvSpPr/>
+          <p:nvPr/>
+        </p:nvSpPr>
+        <p:spPr>
+          <a:xfrm>
+            <a:off x="5349240" y="1783080"/>
+            <a:ext cx="6522415" cy="4663440"/>
+          </a:xfrm>
+          <a:prstGeom prst="rect">
+            <a:avLst/>
+          </a:prstGeom>
+          <a:noFill/>
+          <a:ln/>
+        </p:spPr>
+        <p:txBody>
+          <a:bodyPr wrap="square" lIns="0" tIns="0" rIns="0" bIns="0" rtlCol="0" anchor="t"/>
+          <a:lstStyle/>
+          <a:p>
+            <a:pPr algn="l" indent="0" marL="0">
+              <a:spcAft>
+                <a:spcPts val="800"/>
+              </a:spcAft>
+              <a:buNone/>
+            </a:pPr>
+            <a:r>
+              <a:rPr lang="en-US" sz="4000" dirty="0">
+                <a:solidFill>
+                  <a:srgbClr val="111111"/>
+                </a:solidFill>
+                <a:latin typeface="Times New Roman" pitchFamily="34" charset="0"/>
+                <a:ea typeface="Times New Roman" pitchFamily="34" charset="-122"/>
+                <a:cs typeface="Times New Roman" pitchFamily="34" charset="-120"/>
+              </a:rPr>
+              <a:t>Draw the climograph of Garoua using the data given in class.</a:t>
+            </a:r>
+            <a:endParaRPr lang="en-US" sz="4000" dirty="0"/>
+          </a:p>
+        </p:txBody>
+      </p:sp>
+      <p:sp>
+        <p:nvSpPr>
+          <p:cNvPr id="25" name="Slide Number Placeholder 0"/>
+          <p:cNvSpPr>
+            <a:spLocks noGrp="1"/>
+          </p:cNvSpPr>
+          <p:nvPr>
+            <p:ph type="sldNum" sz="quarter" idx="4294967295"/>
+          </p:nvPr>
+        </p:nvSpPr>
+        <p:spPr>
+          <a:xfrm>
+            <a:off x="27432" y="91440"/>
+            <a:ext cx="585216" cy="475488"/>
+          </a:xfrm>
+          <a:prstGeom prst="rect">
+            <a:avLst/>
+          </a:prstGeom>
+          <a:extLst>
+            <a:ext uri="{C572A759-6A51-4108-AA02-DFA0A04FC94B}">
+              <ma14:wrappingTextBoxFlag xmlns:ma14="http://schemas.microsoft.com/office/mac/drawingml/2011/main" val="0"/>
+            </a:ext>
+          </a:extLst>
+        </p:spPr>
+        <p:txBody>
+          <a:bodyPr/>
+          <a:lstStyle>
+            <a:lvl1pPr>
+              <a:defRPr sz="2000">
+                <a:solidFill>
+                  <a:srgbClr val="FFFFFF"/>
+                </a:solidFill>
+                <a:latin typeface="Calibri"/>
+                <a:ea typeface="Calibri"/>
+                <a:cs typeface="Calibri"/>
+              </a:defRPr>
+            </a:lvl1pPr>
+          </a:lstStyle>
+          <a:p>
+            <a:pPr algn="ctr"/>
+            <a:fld id="{F7021451-1387-4CA6-816F-3879F97B5CBC}" type="slidenum">
+              <a:rPr b="1" lang="en-US"/>
+              <a:t>47</a:t>
+            </a:fld>
+            <a:endParaRPr lang="en-US"/>
+          </a:p>
+        </p:txBody>
+      </p:sp>
+    </p:spTree>
+  </p:cSld>
+  <p:clrMapOvr>
+    <a:masterClrMapping/>
+  </p:clrMapOvr>
+</p:sld>
+</file>
+
+<file path=ppt/slides/slide48.xml><?xml version="1.0" encoding="utf-8"?>
+<p:sld xmlns:a="http://schemas.openxmlformats.org/drawingml/2006/main" xmlns:r="http://schemas.openxmlformats.org/officeDocument/2006/relationships" xmlns:p="http://schemas.openxmlformats.org/presentationml/2006/main">
+  <p:cSld name="Slide 48">
+    <p:spTree>
+      <p:nvGrpSpPr>
+        <p:cNvPr id="1" name=""/>
+        <p:cNvGrpSpPr/>
+        <p:nvPr/>
+      </p:nvGrpSpPr>
+      <p:grpSpPr>
+        <a:xfrm>
+          <a:off x="0" y="0"/>
+          <a:ext cx="0" cy="0"/>
+          <a:chOff x="0" y="0"/>
+          <a:chExt cx="0" cy="0"/>
+        </a:xfrm>
+      </p:grpSpPr>
+      <p:sp>
+        <p:nvSpPr>
+          <p:cNvPr id="2" name="Text 0"/>
+          <p:cNvSpPr/>
+          <p:nvPr/>
+        </p:nvSpPr>
+        <p:spPr>
+          <a:xfrm>
+            <a:off x="457200" y="713232"/>
+            <a:ext cx="11368735" cy="274320"/>
+          </a:xfrm>
+          <a:prstGeom prst="rect">
+            <a:avLst/>
+          </a:prstGeom>
+          <a:noFill/>
+          <a:ln/>
+        </p:spPr>
+        <p:txBody>
+          <a:bodyPr wrap="square" lIns="0" tIns="0" rIns="0" bIns="0" rtlCol="0" anchor="ctr"/>
+          <a:lstStyle/>
+          <a:p>
+            <a:pPr algn="r" indent="0" marL="0">
+              <a:buNone/>
+            </a:pPr>
+            <a:r>
+              <a:rPr lang="en-US" sz="1400" b="1" dirty="0">
+                <a:solidFill>
+                  <a:srgbClr val="1C3F6E"/>
+                </a:solidFill>
+                <a:latin typeface="Calibri" pitchFamily="34" charset="0"/>
+                <a:ea typeface="Calibri" pitchFamily="34" charset="-122"/>
+                <a:cs typeface="Calibri" pitchFamily="34" charset="-120"/>
+              </a:rPr>
+              <a:t>NEXT LESSON</a:t>
+            </a:r>
+            <a:endParaRPr lang="en-US" sz="1400" dirty="0"/>
+          </a:p>
+        </p:txBody>
+      </p:sp>
+      <p:pic>
+        <p:nvPicPr>
+          <p:cNvPr id="3" name="Image 0" descr="/home/claude/f4/img/minesec_sheet.png">    </p:cNvPr>
+          <p:cNvPicPr>
+            <a:picLocks noChangeAspect="1"/>
+          </p:cNvPicPr>
+          <p:nvPr/>
+        </p:nvPicPr>
+        <p:blipFill>
+          <a:blip r:embed="rId1"/>
+          <a:stretch>
+            <a:fillRect/>
+          </a:stretch>
+        </p:blipFill>
+        <p:spPr>
+          <a:xfrm>
+            <a:off x="0" y="658368"/>
+            <a:ext cx="5120640" cy="5833872"/>
+          </a:xfrm>
+          <a:prstGeom prst="rect">
+            <a:avLst/>
+          </a:prstGeom>
+        </p:spPr>
+      </p:pic>
+      <p:sp>
+        <p:nvSpPr>
+          <p:cNvPr id="4" name="Text 1"/>
+          <p:cNvSpPr/>
+          <p:nvPr/>
+        </p:nvSpPr>
+        <p:spPr>
+          <a:xfrm>
+            <a:off x="5349240" y="1005840"/>
+            <a:ext cx="6522415" cy="731520"/>
+          </a:xfrm>
+          <a:prstGeom prst="rect">
+            <a:avLst/>
+          </a:prstGeom>
+          <a:noFill/>
+          <a:ln/>
+        </p:spPr>
+        <p:txBody>
+          <a:bodyPr wrap="square" lIns="0" tIns="0" rIns="0" bIns="0" rtlCol="0" anchor="ctr">
+            <a:normAutofit/>
+          </a:bodyPr>
+          <a:lstStyle/>
+          <a:p>
+            <a:pPr algn="ctr" indent="0" marL="0">
+              <a:buNone/>
+            </a:pPr>
+            <a:r>
+              <a:rPr lang="en-US" sz="3600" b="1" dirty="0">
+                <a:solidFill>
+                  <a:srgbClr val="990011"/>
+                </a:solidFill>
+                <a:latin typeface="Times New Roman" pitchFamily="34" charset="0"/>
+                <a:ea typeface="Times New Roman" pitchFamily="34" charset="-122"/>
+                <a:cs typeface="Times New Roman" pitchFamily="34" charset="-120"/>
+              </a:rPr>
+              <a:t>Next Lesson</a:t>
+            </a:r>
+            <a:endParaRPr lang="en-US" sz="3600" dirty="0"/>
+          </a:p>
+        </p:txBody>
+      </p:sp>
+      <p:sp>
+        <p:nvSpPr>
+          <p:cNvPr id="5" name="Text 2"/>
+          <p:cNvSpPr/>
+          <p:nvPr/>
+        </p:nvSpPr>
+        <p:spPr>
+          <a:xfrm>
+            <a:off x="5349240" y="1783080"/>
+            <a:ext cx="6522415" cy="4663440"/>
+          </a:xfrm>
+          <a:prstGeom prst="rect">
+            <a:avLst/>
+          </a:prstGeom>
+          <a:noFill/>
+          <a:ln/>
+        </p:spPr>
+        <p:txBody>
+          <a:bodyPr wrap="square" lIns="0" tIns="0" rIns="0" bIns="0" rtlCol="0" anchor="ctr"/>
+          <a:lstStyle/>
+          <a:p>
+            <a:pPr algn="ctr" indent="0" marL="0">
+              <a:spcAft>
+                <a:spcPts val="800"/>
+              </a:spcAft>
+              <a:buNone/>
+            </a:pPr>
+            <a:r>
+              <a:rPr lang="en-US" sz="4000" b="1" dirty="0">
+                <a:solidFill>
+                  <a:srgbClr val="111111"/>
+                </a:solidFill>
+                <a:latin typeface="Times New Roman" pitchFamily="34" charset="0"/>
+                <a:ea typeface="Times New Roman" pitchFamily="34" charset="-122"/>
+                <a:cs typeface="Times New Roman" pitchFamily="34" charset="-120"/>
+              </a:rPr>
+              <a:t>Our next lesson will be on:</a:t>
+            </a:r>
+            <a:endParaRPr lang="en-US" sz="4000" dirty="0"/>
+          </a:p>
+          <a:p>
+            <a:pPr algn="ctr" indent="0" marL="0">
+              <a:spcAft>
+                <a:spcPts val="800"/>
+              </a:spcAft>
+              <a:buNone/>
+            </a:pPr>
+            <a:r>
+              <a:rPr lang="en-US" sz="4000" b="1" dirty="0">
+                <a:solidFill>
+                  <a:srgbClr val="990011"/>
+                </a:solidFill>
+                <a:latin typeface="Times New Roman" pitchFamily="34" charset="0"/>
+                <a:ea typeface="Times New Roman" pitchFamily="34" charset="-122"/>
+                <a:cs typeface="Times New Roman" pitchFamily="34" charset="-120"/>
+              </a:rPr>
+              <a:t>Lesson 6: Forms of Degradation of the Natural Regions of Cameroon</a:t>
+            </a:r>
+            <a:endParaRPr lang="en-US" sz="4000" dirty="0"/>
+          </a:p>
+        </p:txBody>
+      </p:sp>
+      <p:sp>
+        <p:nvSpPr>
+          <p:cNvPr id="25" name="Slide Number Placeholder 0"/>
+          <p:cNvSpPr>
+            <a:spLocks noGrp="1"/>
+          </p:cNvSpPr>
+          <p:nvPr>
+            <p:ph type="sldNum" sz="quarter" idx="4294967295"/>
+          </p:nvPr>
+        </p:nvSpPr>
+        <p:spPr>
+          <a:xfrm>
+            <a:off x="27432" y="91440"/>
+            <a:ext cx="585216" cy="475488"/>
+          </a:xfrm>
+          <a:prstGeom prst="rect">
+            <a:avLst/>
+          </a:prstGeom>
+          <a:extLst>
+            <a:ext uri="{C572A759-6A51-4108-AA02-DFA0A04FC94B}">
+              <ma14:wrappingTextBoxFlag xmlns:ma14="http://schemas.microsoft.com/office/mac/drawingml/2011/main" val="0"/>
+            </a:ext>
+          </a:extLst>
+        </p:spPr>
+        <p:txBody>
+          <a:bodyPr/>
+          <a:lstStyle>
+            <a:lvl1pPr>
+              <a:defRPr sz="2000">
+                <a:solidFill>
+                  <a:srgbClr val="FFFFFF"/>
+                </a:solidFill>
+                <a:latin typeface="Calibri"/>
+                <a:ea typeface="Calibri"/>
+                <a:cs typeface="Calibri"/>
+              </a:defRPr>
+            </a:lvl1pPr>
+          </a:lstStyle>
+          <a:p>
+            <a:pPr algn="ctr"/>
+            <a:fld id="{F7021451-1387-4CA6-816F-3879F97B5CBC}" type="slidenum">
+              <a:rPr b="1" lang="en-US"/>
+              <a:t>48</a:t>
+            </a:fld>
+            <a:endParaRPr lang="en-US"/>
+          </a:p>
+        </p:txBody>
+      </p:sp>
+    </p:spTree>
+  </p:cSld>
+  <p:clrMapOvr>
+    <a:masterClrMapping/>
+  </p:clrMapOvr>
+</p:sld>
+</file>
+
+<file path=ppt/slides/slide49.xml><?xml version="1.0" encoding="utf-8"?>
+<p:sld xmlns:a="http://schemas.openxmlformats.org/drawingml/2006/main" xmlns:r="http://schemas.openxmlformats.org/officeDocument/2006/relationships" xmlns:p="http://schemas.openxmlformats.org/presentationml/2006/main">
+  <p:cSld name="Slide 49">
+    <p:spTree>
+      <p:nvGrpSpPr>
+        <p:cNvPr id="1" name=""/>
+        <p:cNvGrpSpPr/>
+        <p:nvPr/>
+      </p:nvGrpSpPr>
+      <p:grpSpPr>
+        <a:xfrm>
+          <a:off x="0" y="0"/>
+          <a:ext cx="0" cy="0"/>
+          <a:chOff x="0" y="0"/>
+          <a:chExt cx="0" cy="0"/>
+        </a:xfrm>
+      </p:grpSpPr>
+      <p:sp>
+        <p:nvSpPr>
+          <p:cNvPr id="2" name="Text 0"/>
+          <p:cNvSpPr/>
+          <p:nvPr/>
+        </p:nvSpPr>
+        <p:spPr>
+          <a:xfrm>
+            <a:off x="457200" y="713232"/>
+            <a:ext cx="11368735" cy="274320"/>
+          </a:xfrm>
+          <a:prstGeom prst="rect">
+            <a:avLst/>
+          </a:prstGeom>
+          <a:noFill/>
+          <a:ln/>
+        </p:spPr>
+        <p:txBody>
+          <a:bodyPr wrap="square" lIns="0" tIns="0" rIns="0" bIns="0" rtlCol="0" anchor="ctr"/>
+          <a:lstStyle/>
+          <a:p>
+            <a:pPr algn="r" indent="0" marL="0">
+              <a:buNone/>
+            </a:pPr>
+            <a:r>
+              <a:rPr lang="en-US" sz="1400" b="1" dirty="0">
+                <a:solidFill>
+                  <a:srgbClr val="1C3F6E"/>
+                </a:solidFill>
+                <a:latin typeface="Calibri" pitchFamily="34" charset="0"/>
+                <a:ea typeface="Calibri" pitchFamily="34" charset="-122"/>
+                <a:cs typeface="Calibri" pitchFamily="34" charset="-120"/>
+              </a:rPr>
               <a:t>BILINGUAL GAME</a:t>
             </a:r>
             <a:endParaRPr lang="en-US" sz="1400" dirty="0"/>
@@ -16654,7 +17443,7 @@
       </p:sp>
       <p:graphicFrame>
         <p:nvGraphicFramePr>
-          <p:cNvPr id="48" name="Table 0"/>
+          <p:cNvPr id="50" name="Table 0"/>
           <p:cNvGraphicFramePr>
             <a:graphicFrameLocks noGrp="1"/>
           </p:cNvGraphicFramePr>
@@ -17690,7 +18479,7 @@
             <a:pPr algn="ctr"/>
             <a:fld id="{F7021451-1387-4CA6-816F-3879F97B5CBC}" type="slidenum">
               <a:rPr b="1" lang="en-US"/>
-              <a:t>47</a:t>
+              <a:t>49</a:t>
             </a:fld>
             <a:endParaRPr lang="en-US"/>
           </a:p>
@@ -17704,9 +18493,9 @@
 </p:sld>
 </file>
 
-<file path=ppt/slides/slide48.xml><?xml version="1.0" encoding="utf-8"?>
+<file path=ppt/slides/slide5.xml><?xml version="1.0" encoding="utf-8"?>
 <p:sld xmlns:a="http://schemas.openxmlformats.org/drawingml/2006/main" xmlns:r="http://schemas.openxmlformats.org/officeDocument/2006/relationships" xmlns:p="http://schemas.openxmlformats.org/presentationml/2006/main">
-  <p:cSld name="Slide 48">
+  <p:cSld name="Slide 5">
     <p:spTree>
       <p:nvGrpSpPr>
         <p:cNvPr id="1" name=""/>
@@ -17754,6 +18543,225 @@
                 <a:ea typeface="Calibri" pitchFamily="34" charset="-122"/>
                 <a:cs typeface="Calibri" pitchFamily="34" charset="-120"/>
               </a:rPr>
+              <a:t>HOMEWORK CORRECTION</a:t>
+            </a:r>
+            <a:endParaRPr lang="en-US" sz="1400" dirty="0"/>
+          </a:p>
+        </p:txBody>
+      </p:sp>
+      <p:pic>
+        <p:nvPicPr>
+          <p:cNvPr id="3" name="Image 0" descr="/home/claude/f4/img/minesec_sheet.png">    </p:cNvPr>
+          <p:cNvPicPr>
+            <a:picLocks noChangeAspect="1"/>
+          </p:cNvPicPr>
+          <p:nvPr/>
+        </p:nvPicPr>
+        <p:blipFill>
+          <a:blip r:embed="rId1"/>
+          <a:stretch>
+            <a:fillRect/>
+          </a:stretch>
+        </p:blipFill>
+        <p:spPr>
+          <a:xfrm>
+            <a:off x="0" y="658368"/>
+            <a:ext cx="5120640" cy="5833872"/>
+          </a:xfrm>
+          <a:prstGeom prst="rect">
+            <a:avLst/>
+          </a:prstGeom>
+        </p:spPr>
+      </p:pic>
+      <p:sp>
+        <p:nvSpPr>
+          <p:cNvPr id="4" name="Text 1"/>
+          <p:cNvSpPr/>
+          <p:nvPr/>
+        </p:nvSpPr>
+        <p:spPr>
+          <a:xfrm>
+            <a:off x="5349240" y="1005840"/>
+            <a:ext cx="6522415" cy="731520"/>
+          </a:xfrm>
+          <a:prstGeom prst="rect">
+            <a:avLst/>
+          </a:prstGeom>
+          <a:noFill/>
+          <a:ln/>
+        </p:spPr>
+        <p:txBody>
+          <a:bodyPr wrap="square" lIns="0" tIns="0" rIns="0" bIns="0" rtlCol="0" anchor="ctr">
+            <a:normAutofit/>
+          </a:bodyPr>
+          <a:lstStyle/>
+          <a:p>
+            <a:pPr algn="ctr" indent="0" marL="0">
+              <a:buNone/>
+            </a:pPr>
+            <a:r>
+              <a:rPr lang="en-US" sz="3600" b="1" dirty="0">
+                <a:solidFill>
+                  <a:srgbClr val="990011"/>
+                </a:solidFill>
+                <a:latin typeface="Times New Roman" pitchFamily="34" charset="0"/>
+                <a:ea typeface="Times New Roman" pitchFamily="34" charset="-122"/>
+                <a:cs typeface="Times New Roman" pitchFamily="34" charset="-120"/>
+              </a:rPr>
+              <a:t>Correction: Possible Answer</a:t>
+            </a:r>
+            <a:endParaRPr lang="en-US" sz="3600" dirty="0"/>
+          </a:p>
+        </p:txBody>
+      </p:sp>
+      <p:sp>
+        <p:nvSpPr>
+          <p:cNvPr id="5" name="Text 2"/>
+          <p:cNvSpPr/>
+          <p:nvPr/>
+        </p:nvSpPr>
+        <p:spPr>
+          <a:xfrm>
+            <a:off x="5349240" y="1783080"/>
+            <a:ext cx="6522415" cy="4663440"/>
+          </a:xfrm>
+          <a:prstGeom prst="rect">
+            <a:avLst/>
+          </a:prstGeom>
+          <a:noFill/>
+          <a:ln/>
+        </p:spPr>
+        <p:txBody>
+          <a:bodyPr wrap="square" lIns="0" tIns="0" rIns="0" bIns="0" rtlCol="0" anchor="t"/>
+          <a:lstStyle/>
+          <a:p>
+            <a:pPr algn="l" indent="0" marL="0">
+              <a:spcAft>
+                <a:spcPts val="800"/>
+              </a:spcAft>
+              <a:buNone/>
+            </a:pPr>
+            <a:r>
+              <a:rPr lang="en-US" sz="4000" dirty="0">
+                <a:solidFill>
+                  <a:srgbClr val="111111"/>
+                </a:solidFill>
+                <a:latin typeface="Times New Roman" pitchFamily="34" charset="0"/>
+                <a:ea typeface="Times New Roman" pitchFamily="34" charset="-122"/>
+                <a:cs typeface="Times New Roman" pitchFamily="34" charset="-120"/>
+              </a:rPr>
+              <a:t>About five to six months, from May to October; the heaviest rains fall in July and August.</a:t>
+            </a:r>
+            <a:endParaRPr lang="en-US" sz="4000" dirty="0"/>
+          </a:p>
+        </p:txBody>
+      </p:sp>
+      <p:sp>
+        <p:nvSpPr>
+          <p:cNvPr id="25" name="Slide Number Placeholder 0"/>
+          <p:cNvSpPr>
+            <a:spLocks noGrp="1"/>
+          </p:cNvSpPr>
+          <p:nvPr>
+            <p:ph type="sldNum" sz="quarter" idx="4294967295"/>
+          </p:nvPr>
+        </p:nvSpPr>
+        <p:spPr>
+          <a:xfrm>
+            <a:off x="27432" y="91440"/>
+            <a:ext cx="585216" cy="475488"/>
+          </a:xfrm>
+          <a:prstGeom prst="rect">
+            <a:avLst/>
+          </a:prstGeom>
+          <a:extLst>
+            <a:ext uri="{C572A759-6A51-4108-AA02-DFA0A04FC94B}">
+              <ma14:wrappingTextBoxFlag xmlns:ma14="http://schemas.microsoft.com/office/mac/drawingml/2011/main" val="0"/>
+            </a:ext>
+          </a:extLst>
+        </p:spPr>
+        <p:txBody>
+          <a:bodyPr/>
+          <a:lstStyle>
+            <a:lvl1pPr>
+              <a:defRPr sz="2000">
+                <a:solidFill>
+                  <a:srgbClr val="FFFFFF"/>
+                </a:solidFill>
+                <a:latin typeface="Calibri"/>
+                <a:ea typeface="Calibri"/>
+                <a:cs typeface="Calibri"/>
+              </a:defRPr>
+            </a:lvl1pPr>
+          </a:lstStyle>
+          <a:p>
+            <a:pPr algn="ctr"/>
+            <a:fld id="{F7021451-1387-4CA6-816F-3879F97B5CBC}" type="slidenum">
+              <a:rPr b="1" lang="en-US"/>
+              <a:t>5</a:t>
+            </a:fld>
+            <a:endParaRPr lang="en-US"/>
+          </a:p>
+        </p:txBody>
+      </p:sp>
+    </p:spTree>
+  </p:cSld>
+  <p:clrMapOvr>
+    <a:masterClrMapping/>
+  </p:clrMapOvr>
+</p:sld>
+</file>
+
+<file path=ppt/slides/slide50.xml><?xml version="1.0" encoding="utf-8"?>
+<p:sld xmlns:a="http://schemas.openxmlformats.org/drawingml/2006/main" xmlns:r="http://schemas.openxmlformats.org/officeDocument/2006/relationships" xmlns:p="http://schemas.openxmlformats.org/presentationml/2006/main">
+  <p:cSld name="Slide 50">
+    <p:spTree>
+      <p:nvGrpSpPr>
+        <p:cNvPr id="1" name=""/>
+        <p:cNvGrpSpPr/>
+        <p:nvPr/>
+      </p:nvGrpSpPr>
+      <p:grpSpPr>
+        <a:xfrm>
+          <a:off x="0" y="0"/>
+          <a:ext cx="0" cy="0"/>
+          <a:chOff x="0" y="0"/>
+          <a:chExt cx="0" cy="0"/>
+        </a:xfrm>
+      </p:grpSpPr>
+      <p:sp>
+        <p:nvSpPr>
+          <p:cNvPr id="2" name="Text 0"/>
+          <p:cNvSpPr/>
+          <p:nvPr/>
+        </p:nvSpPr>
+        <p:spPr>
+          <a:xfrm>
+            <a:off x="457200" y="713232"/>
+            <a:ext cx="11368735" cy="274320"/>
+          </a:xfrm>
+          <a:prstGeom prst="rect">
+            <a:avLst/>
+          </a:prstGeom>
+          <a:noFill/>
+          <a:ln/>
+        </p:spPr>
+        <p:txBody>
+          <a:bodyPr wrap="square" lIns="0" tIns="0" rIns="0" bIns="0" rtlCol="0" anchor="ctr"/>
+          <a:lstStyle/>
+          <a:p>
+            <a:pPr algn="r" indent="0" marL="0">
+              <a:buNone/>
+            </a:pPr>
+            <a:r>
+              <a:rPr lang="en-US" sz="1400" b="1" dirty="0">
+                <a:solidFill>
+                  <a:srgbClr val="1C3F6E"/>
+                </a:solidFill>
+                <a:latin typeface="Calibri" pitchFamily="34" charset="0"/>
+                <a:ea typeface="Calibri" pitchFamily="34" charset="-122"/>
+                <a:cs typeface="Calibri" pitchFamily="34" charset="-120"/>
+              </a:rPr>
               <a:t>LOGBOOK</a:t>
             </a:r>
             <a:endParaRPr lang="en-US" sz="1400" dirty="0"/>
@@ -17801,7 +18809,7 @@
       </p:sp>
       <p:graphicFrame>
         <p:nvGraphicFramePr>
-          <p:cNvPr id="49" name="Table 0"/>
+          <p:cNvPr id="51" name="Table 0"/>
           <p:cNvGraphicFramePr>
             <a:graphicFrameLocks noGrp="1"/>
           </p:cNvGraphicFramePr>
@@ -18423,7 +19431,7 @@
             <a:pPr algn="ctr"/>
             <a:fld id="{F7021451-1387-4CA6-816F-3879F97B5CBC}" type="slidenum">
               <a:rPr b="1" lang="en-US"/>
-              <a:t>48</a:t>
+              <a:t>50</a:t>
             </a:fld>
             <a:endParaRPr lang="en-US"/>
           </a:p>
@@ -18437,9 +19445,9 @@
 </p:sld>
 </file>
 
-<file path=ppt/slides/slide49.xml><?xml version="1.0" encoding="utf-8"?>
+<file path=ppt/slides/slide51.xml><?xml version="1.0" encoding="utf-8"?>
 <p:sld xmlns:a="http://schemas.openxmlformats.org/drawingml/2006/main" xmlns:r="http://schemas.openxmlformats.org/officeDocument/2006/relationships" xmlns:p="http://schemas.openxmlformats.org/presentationml/2006/main">
-  <p:cSld name="Slide 49">
+  <p:cSld name="Slide 51">
     <p:spTree>
       <p:nvGrpSpPr>
         <p:cNvPr id="1" name=""/>
@@ -18534,7 +19542,7 @@
       </p:sp>
       <p:graphicFrame>
         <p:nvGraphicFramePr>
-          <p:cNvPr id="50" name="Table 0"/>
+          <p:cNvPr id="52" name="Table 0"/>
           <p:cNvGraphicFramePr>
             <a:graphicFrameLocks noGrp="1"/>
           </p:cNvGraphicFramePr>
@@ -18644,7 +19652,7 @@
                           <a:ea typeface="Calibri" pitchFamily="34" charset="-122"/>
                           <a:cs typeface="Calibri" pitchFamily="34" charset="-120"/>
                         </a:rPr>
-                        <a:t>DEFINITIONS; Steps to Draw a Climograph; Reading a Climograph.</a:t>
+                        <a:t>DEFINITIONS; Construction of a Climograph; Reading a Climograph.</a:t>
                       </a:r>
                       <a:endParaRPr lang="en-US" sz="1600" dirty="0">
                         <a:latin typeface="Calibri" charset="0"/>
@@ -19294,7 +20302,7 @@
             <a:pPr algn="ctr"/>
             <a:fld id="{F7021451-1387-4CA6-816F-3879F97B5CBC}" type="slidenum">
               <a:rPr b="1" lang="en-US"/>
-              <a:t>49</a:t>
+              <a:t>51</a:t>
             </a:fld>
             <a:endParaRPr lang="en-US"/>
           </a:p>
@@ -19308,9 +20316,9 @@
 </p:sld>
 </file>
 
-<file path=ppt/slides/slide5.xml><?xml version="1.0" encoding="utf-8"?>
+<file path=ppt/slides/slide52.xml><?xml version="1.0" encoding="utf-8"?>
 <p:sld xmlns:a="http://schemas.openxmlformats.org/drawingml/2006/main" xmlns:r="http://schemas.openxmlformats.org/officeDocument/2006/relationships" xmlns:p="http://schemas.openxmlformats.org/presentationml/2006/main">
-  <p:cSld name="Slide 5">
+  <p:cSld name="Slide 52">
     <p:spTree>
       <p:nvGrpSpPr>
         <p:cNvPr id="1" name=""/>
@@ -19358,7 +20366,7 @@
                 <a:ea typeface="Calibri" pitchFamily="34" charset="-122"/>
                 <a:cs typeface="Calibri" pitchFamily="34" charset="-120"/>
               </a:rPr>
-              <a:t>HOMEWORK CORRECTION</a:t>
+              <a:t>TEACHER'S NOTE</a:t>
             </a:r>
             <a:endParaRPr lang="en-US" sz="1400" dirty="0"/>
           </a:p>
@@ -19381,7 +20389,7 @@
         <p:spPr>
           <a:xfrm>
             <a:off x="0" y="658368"/>
-            <a:ext cx="5120640" cy="5833872"/>
+            <a:ext cx="3840480" cy="5833872"/>
           </a:xfrm>
           <a:prstGeom prst="rect">
             <a:avLst/>
@@ -19396,8 +20404,8 @@
         </p:nvSpPr>
         <p:spPr>
           <a:xfrm>
-            <a:off x="5349240" y="1005840"/>
-            <a:ext cx="6522415" cy="731520"/>
+            <a:off x="4069080" y="1005840"/>
+            <a:ext cx="7802575" cy="731520"/>
           </a:xfrm>
           <a:prstGeom prst="rect">
             <a:avLst/>
@@ -19423,7 +20431,7 @@
                 <a:ea typeface="Times New Roman" pitchFamily="34" charset="-122"/>
                 <a:cs typeface="Times New Roman" pitchFamily="34" charset="-120"/>
               </a:rPr>
-              <a:t>Correction: Possible Answer</a:t>
+              <a:t>Teacher's Note</a:t>
             </a:r>
             <a:endParaRPr lang="en-US" sz="3600" dirty="0"/>
           </a:p>
@@ -19437,8 +20445,8 @@
         </p:nvSpPr>
         <p:spPr>
           <a:xfrm>
-            <a:off x="5349240" y="1783080"/>
-            <a:ext cx="6522415" cy="4663440"/>
+            <a:off x="4069080" y="1783080"/>
+            <a:ext cx="7802575" cy="4663440"/>
           </a:xfrm>
           <a:prstGeom prst="rect">
             <a:avLst/>
@@ -19450,24 +20458,130 @@
           <a:bodyPr wrap="square" lIns="0" tIns="0" rIns="0" bIns="0" rtlCol="0" anchor="t"/>
           <a:lstStyle/>
           <a:p>
-            <a:pPr algn="l" indent="0" marL="0">
+            <a:pPr algn="l" marL="342900" indent="-342900">
               <a:spcAft>
                 <a:spcPts val="800"/>
               </a:spcAft>
-              <a:buNone/>
+              <a:buSzPct val="100000"/>
+              <a:buChar char="•"/>
             </a:pPr>
             <a:r>
-              <a:rPr lang="en-US" sz="4000" dirty="0">
+              <a:rPr lang="en-US" sz="2000" dirty="0">
                 <a:solidFill>
                   <a:srgbClr val="111111"/>
                 </a:solidFill>
-                <a:latin typeface="Times New Roman" pitchFamily="34" charset="0"/>
-                <a:ea typeface="Times New Roman" pitchFamily="34" charset="-122"/>
-                <a:cs typeface="Times New Roman" pitchFamily="34" charset="-120"/>
+                <a:latin typeface="Calibri" pitchFamily="34" charset="0"/>
+                <a:ea typeface="Calibri" pitchFamily="34" charset="-122"/>
+                <a:cs typeface="Calibri" pitchFamily="34" charset="-120"/>
               </a:rPr>
-              <a:t>About five to six months, from May to October; the heaviest rains fall in July and August.</a:t>
-            </a:r>
-            <a:endParaRPr lang="en-US" sz="4000" dirty="0"/>
+              <a:t>Timing: Homework correction, plan, objectives 8 min | Recall, situation, action 10 min | 5 activities 30 min | Board summary (copying) 30 min | Evaluation, remediation 10 min | Homework, next lesson 5 min | Logbook 7 min</a:t>
+            </a:r>
+            <a:endParaRPr lang="en-US" sz="2000" dirty="0"/>
+          </a:p>
+          <a:p>
+            <a:pPr algn="l" marL="342900" indent="-342900">
+              <a:spcAft>
+                <a:spcPts val="800"/>
+              </a:spcAft>
+              <a:buSzPct val="100000"/>
+              <a:buChar char="•"/>
+            </a:pPr>
+            <a:r>
+              <a:rPr lang="en-US" sz="2000" dirty="0">
+                <a:solidFill>
+                  <a:srgbClr val="111111"/>
+                </a:solidFill>
+                <a:latin typeface="Calibri" pitchFamily="34" charset="0"/>
+                <a:ea typeface="Calibri" pitchFamily="34" charset="-122"/>
+                <a:cs typeface="Calibri" pitchFamily="34" charset="-120"/>
+              </a:rPr>
+              <a:t>Without the projector (Activity 1): draw a simple climograph on the board.</a:t>
+            </a:r>
+            <a:endParaRPr lang="en-US" sz="2000" dirty="0"/>
+          </a:p>
+          <a:p>
+            <a:pPr algn="l" marL="342900" indent="-342900">
+              <a:spcAft>
+                <a:spcPts val="800"/>
+              </a:spcAft>
+              <a:buSzPct val="100000"/>
+              <a:buChar char="•"/>
+            </a:pPr>
+            <a:r>
+              <a:rPr lang="en-US" sz="2000" dirty="0">
+                <a:solidFill>
+                  <a:srgbClr val="111111"/>
+                </a:solidFill>
+                <a:latin typeface="Calibri" pitchFamily="34" charset="0"/>
+                <a:ea typeface="Calibri" pitchFamily="34" charset="-122"/>
+                <a:cs typeface="Calibri" pitchFamily="34" charset="-120"/>
+              </a:rPr>
+              <a:t>Without the projector (Activity 2): point at the bars.</a:t>
+            </a:r>
+            <a:endParaRPr lang="en-US" sz="2000" dirty="0"/>
+          </a:p>
+          <a:p>
+            <a:pPr algn="l" marL="342900" indent="-342900">
+              <a:spcAft>
+                <a:spcPts val="800"/>
+              </a:spcAft>
+              <a:buSzPct val="100000"/>
+              <a:buChar char="•"/>
+            </a:pPr>
+            <a:r>
+              <a:rPr lang="en-US" sz="2000" dirty="0">
+                <a:solidFill>
+                  <a:srgbClr val="111111"/>
+                </a:solidFill>
+                <a:latin typeface="Calibri" pitchFamily="34" charset="0"/>
+                <a:ea typeface="Calibri" pitchFamily="34" charset="-122"/>
+                <a:cs typeface="Calibri" pitchFamily="34" charset="-120"/>
+              </a:rPr>
+              <a:t>Without the projector (Activity 3): draw the axes on the board.</a:t>
+            </a:r>
+            <a:endParaRPr lang="en-US" sz="2000" dirty="0"/>
+          </a:p>
+          <a:p>
+            <a:pPr algn="l" marL="342900" indent="-342900">
+              <a:spcAft>
+                <a:spcPts val="800"/>
+              </a:spcAft>
+              <a:buSzPct val="100000"/>
+              <a:buChar char="•"/>
+            </a:pPr>
+            <a:r>
+              <a:rPr lang="en-US" sz="2000" dirty="0">
+                <a:solidFill>
+                  <a:srgbClr val="111111"/>
+                </a:solidFill>
+                <a:latin typeface="Calibri" pitchFamily="34" charset="0"/>
+                <a:ea typeface="Calibri" pitchFamily="34" charset="-122"/>
+                <a:cs typeface="Calibri" pitchFamily="34" charset="-120"/>
+              </a:rPr>
+              <a:t>Without the projector (Activity 4): read the table.</a:t>
+            </a:r>
+            <a:endParaRPr lang="en-US" sz="2000" dirty="0"/>
+          </a:p>
+          <a:p>
+            <a:pPr algn="l" marL="342900" indent="-342900">
+              <a:spcAft>
+                <a:spcPts val="800"/>
+              </a:spcAft>
+              <a:buSzPct val="100000"/>
+              <a:buChar char="•"/>
+            </a:pPr>
+            <a:r>
+              <a:rPr lang="en-US" sz="2000" dirty="0">
+                <a:solidFill>
+                  <a:srgbClr val="111111"/>
+                </a:solidFill>
+                <a:latin typeface="Calibri" pitchFamily="34" charset="0"/>
+                <a:ea typeface="Calibri" pitchFamily="34" charset="-122"/>
+                <a:cs typeface="Calibri" pitchFamily="34" charset="-120"/>
+              </a:rPr>
+              <a:t>Without the projector (Activity 5): compare the two tables.</a:t>
+            </a:r>
+            <a:endParaRPr lang="en-US" sz="2000" dirty="0"/>
           </a:p>
         </p:txBody>
       </p:sp>
@@ -19513,7 +20627,7 @@
             <a:pPr algn="ctr"/>
             <a:fld id="{F7021451-1387-4CA6-816F-3879F97B5CBC}" type="slidenum">
               <a:rPr b="1" lang="en-US"/>
-              <a:t>5</a:t>
+              <a:t>52</a:t>
             </a:fld>
             <a:endParaRPr lang="en-US"/>
           </a:p>
@@ -19527,9 +20641,9 @@
 </p:sld>
 </file>
 
-<file path=ppt/slides/slide50.xml><?xml version="1.0" encoding="utf-8"?>
+<file path=ppt/slides/slide53.xml><?xml version="1.0" encoding="utf-8"?>
 <p:sld xmlns:a="http://schemas.openxmlformats.org/drawingml/2006/main" xmlns:r="http://schemas.openxmlformats.org/officeDocument/2006/relationships" xmlns:p="http://schemas.openxmlformats.org/presentationml/2006/main">
-  <p:cSld name="Slide 50">
+  <p:cSld name="Slide 53">
     <p:spTree>
       <p:nvGrpSpPr>
         <p:cNvPr id="1" name=""/>
@@ -19577,7 +20691,7 @@
                 <a:ea typeface="Calibri" pitchFamily="34" charset="-122"/>
                 <a:cs typeface="Calibri" pitchFamily="34" charset="-120"/>
               </a:rPr>
-              <a:t>TEACHER'S NOTE</a:t>
+              <a:t>REFERENCES</a:t>
             </a:r>
             <a:endParaRPr lang="en-US" sz="1400" dirty="0"/>
           </a:p>
@@ -19600,7 +20714,7 @@
         <p:spPr>
           <a:xfrm>
             <a:off x="0" y="658368"/>
-            <a:ext cx="3840480" cy="5833872"/>
+            <a:ext cx="5120640" cy="5833872"/>
           </a:xfrm>
           <a:prstGeom prst="rect">
             <a:avLst/>
@@ -19615,8 +20729,8 @@
         </p:nvSpPr>
         <p:spPr>
           <a:xfrm>
-            <a:off x="4069080" y="1005840"/>
-            <a:ext cx="7802575" cy="731520"/>
+            <a:off x="5349240" y="1005840"/>
+            <a:ext cx="6522415" cy="731520"/>
           </a:xfrm>
           <a:prstGeom prst="rect">
             <a:avLst/>
@@ -19642,7 +20756,7 @@
                 <a:ea typeface="Times New Roman" pitchFamily="34" charset="-122"/>
                 <a:cs typeface="Times New Roman" pitchFamily="34" charset="-120"/>
               </a:rPr>
-              <a:t>Teacher's Note</a:t>
+              <a:t>References</a:t>
             </a:r>
             <a:endParaRPr lang="en-US" sz="3600" dirty="0"/>
           </a:p>
@@ -19656,8 +20770,8 @@
         </p:nvSpPr>
         <p:spPr>
           <a:xfrm>
-            <a:off x="4069080" y="1783080"/>
-            <a:ext cx="7802575" cy="4663440"/>
+            <a:off x="5349240" y="1783080"/>
+            <a:ext cx="6522415" cy="4663440"/>
           </a:xfrm>
           <a:prstGeom prst="rect">
             <a:avLst/>
@@ -19677,7 +20791,7 @@
               <a:buChar char="•"/>
             </a:pPr>
             <a:r>
-              <a:rPr lang="en-US" sz="2000" dirty="0">
+              <a:rPr lang="en-US" sz="1800" dirty="0">
                 <a:solidFill>
                   <a:srgbClr val="111111"/>
                 </a:solidFill>
@@ -19685,9 +20799,9 @@
                 <a:ea typeface="Calibri" pitchFamily="34" charset="-122"/>
                 <a:cs typeface="Calibri" pitchFamily="34" charset="-120"/>
               </a:rPr>
-              <a:t>Timing: Homework correction, plan, objectives 8 min | Recall, situation, action 10 min | 5 activities 30 min | Board summary (copying) 30 min | Evaluation, remediation 10 min | Homework, next lesson 5 min | Logbook 7 min</a:t>
-            </a:r>
-            <a:endParaRPr lang="en-US" sz="2000" dirty="0"/>
+              <a:t>Geography Syllabus, Forms I–V, MINESEC (2023) — Form 1, Module 2: Preservation of the Environment.</a:t>
+            </a:r>
+            <a:endParaRPr lang="en-US" sz="1800" dirty="0"/>
           </a:p>
           <a:p>
             <a:pPr algn="l" marL="342900" indent="-342900">
@@ -19698,7 +20812,7 @@
               <a:buChar char="•"/>
             </a:pPr>
             <a:r>
-              <a:rPr lang="en-US" sz="2000" dirty="0">
+              <a:rPr lang="en-US" sz="1800" dirty="0">
                 <a:solidFill>
                   <a:srgbClr val="111111"/>
                 </a:solidFill>
@@ -19706,93 +20820,9 @@
                 <a:ea typeface="Calibri" pitchFamily="34" charset="-122"/>
                 <a:cs typeface="Calibri" pitchFamily="34" charset="-120"/>
               </a:rPr>
-              <a:t>Without the projector (Activity 1): draw a simple climograph on the board.</a:t>
-            </a:r>
-            <a:endParaRPr lang="en-US" sz="2000" dirty="0"/>
-          </a:p>
-          <a:p>
-            <a:pPr algn="l" marL="342900" indent="-342900">
-              <a:spcAft>
-                <a:spcPts val="800"/>
-              </a:spcAft>
-              <a:buSzPct val="100000"/>
-              <a:buChar char="•"/>
-            </a:pPr>
-            <a:r>
-              <a:rPr lang="en-US" sz="2000" dirty="0">
-                <a:solidFill>
-                  <a:srgbClr val="111111"/>
-                </a:solidFill>
-                <a:latin typeface="Calibri" pitchFamily="34" charset="0"/>
-                <a:ea typeface="Calibri" pitchFamily="34" charset="-122"/>
-                <a:cs typeface="Calibri" pitchFamily="34" charset="-120"/>
-              </a:rPr>
-              <a:t>Without the projector (Activity 2): draw the axes on the board.</a:t>
-            </a:r>
-            <a:endParaRPr lang="en-US" sz="2000" dirty="0"/>
-          </a:p>
-          <a:p>
-            <a:pPr algn="l" marL="342900" indent="-342900">
-              <a:spcAft>
-                <a:spcPts val="800"/>
-              </a:spcAft>
-              <a:buSzPct val="100000"/>
-              <a:buChar char="•"/>
-            </a:pPr>
-            <a:r>
-              <a:rPr lang="en-US" sz="2000" dirty="0">
-                <a:solidFill>
-                  <a:srgbClr val="111111"/>
-                </a:solidFill>
-                <a:latin typeface="Calibri" pitchFamily="34" charset="0"/>
-                <a:ea typeface="Calibri" pitchFamily="34" charset="-122"/>
-                <a:cs typeface="Calibri" pitchFamily="34" charset="-120"/>
-              </a:rPr>
-              <a:t>Without the projector (Activity 3): give learners the data table.</a:t>
-            </a:r>
-            <a:endParaRPr lang="en-US" sz="2000" dirty="0"/>
-          </a:p>
-          <a:p>
-            <a:pPr algn="l" marL="342900" indent="-342900">
-              <a:spcAft>
-                <a:spcPts val="800"/>
-              </a:spcAft>
-              <a:buSzPct val="100000"/>
-              <a:buChar char="•"/>
-            </a:pPr>
-            <a:r>
-              <a:rPr lang="en-US" sz="2000" dirty="0">
-                <a:solidFill>
-                  <a:srgbClr val="111111"/>
-                </a:solidFill>
-                <a:latin typeface="Calibri" pitchFamily="34" charset="0"/>
-                <a:ea typeface="Calibri" pitchFamily="34" charset="-122"/>
-                <a:cs typeface="Calibri" pitchFamily="34" charset="-120"/>
-              </a:rPr>
-              <a:t>Without the projector (Activity 4): read the table.</a:t>
-            </a:r>
-            <a:endParaRPr lang="en-US" sz="2000" dirty="0"/>
-          </a:p>
-          <a:p>
-            <a:pPr algn="l" marL="342900" indent="-342900">
-              <a:spcAft>
-                <a:spcPts val="800"/>
-              </a:spcAft>
-              <a:buSzPct val="100000"/>
-              <a:buChar char="•"/>
-            </a:pPr>
-            <a:r>
-              <a:rPr lang="en-US" sz="2000" dirty="0">
-                <a:solidFill>
-                  <a:srgbClr val="111111"/>
-                </a:solidFill>
-                <a:latin typeface="Calibri" pitchFamily="34" charset="0"/>
-                <a:ea typeface="Calibri" pitchFamily="34" charset="-122"/>
-                <a:cs typeface="Calibri" pitchFamily="34" charset="-120"/>
-              </a:rPr>
-              <a:t>Without the projector (Activity 5): compare the two tables.</a:t>
-            </a:r>
-            <a:endParaRPr lang="en-US" sz="2000" dirty="0"/>
+              <a:t>Diagrams and animations: drawn for this lesson (Geography Department).</a:t>
+            </a:r>
+            <a:endParaRPr lang="en-US" sz="1800" dirty="0"/>
           </a:p>
         </p:txBody>
       </p:sp>
@@ -19838,248 +20868,7 @@
             <a:pPr algn="ctr"/>
             <a:fld id="{F7021451-1387-4CA6-816F-3879F97B5CBC}" type="slidenum">
               <a:rPr b="1" lang="en-US"/>
-              <a:t>50</a:t>
-            </a:fld>
-            <a:endParaRPr lang="en-US"/>
-          </a:p>
-        </p:txBody>
-      </p:sp>
-    </p:spTree>
-  </p:cSld>
-  <p:clrMapOvr>
-    <a:masterClrMapping/>
-  </p:clrMapOvr>
-</p:sld>
-</file>
-
-<file path=ppt/slides/slide51.xml><?xml version="1.0" encoding="utf-8"?>
-<p:sld xmlns:a="http://schemas.openxmlformats.org/drawingml/2006/main" xmlns:r="http://schemas.openxmlformats.org/officeDocument/2006/relationships" xmlns:p="http://schemas.openxmlformats.org/presentationml/2006/main">
-  <p:cSld name="Slide 51">
-    <p:spTree>
-      <p:nvGrpSpPr>
-        <p:cNvPr id="1" name=""/>
-        <p:cNvGrpSpPr/>
-        <p:nvPr/>
-      </p:nvGrpSpPr>
-      <p:grpSpPr>
-        <a:xfrm>
-          <a:off x="0" y="0"/>
-          <a:ext cx="0" cy="0"/>
-          <a:chOff x="0" y="0"/>
-          <a:chExt cx="0" cy="0"/>
-        </a:xfrm>
-      </p:grpSpPr>
-      <p:sp>
-        <p:nvSpPr>
-          <p:cNvPr id="2" name="Text 0"/>
-          <p:cNvSpPr/>
-          <p:nvPr/>
-        </p:nvSpPr>
-        <p:spPr>
-          <a:xfrm>
-            <a:off x="457200" y="713232"/>
-            <a:ext cx="11368735" cy="274320"/>
-          </a:xfrm>
-          <a:prstGeom prst="rect">
-            <a:avLst/>
-          </a:prstGeom>
-          <a:noFill/>
-          <a:ln/>
-        </p:spPr>
-        <p:txBody>
-          <a:bodyPr wrap="square" lIns="0" tIns="0" rIns="0" bIns="0" rtlCol="0" anchor="ctr"/>
-          <a:lstStyle/>
-          <a:p>
-            <a:pPr algn="r" indent="0" marL="0">
-              <a:buNone/>
-            </a:pPr>
-            <a:r>
-              <a:rPr lang="en-US" sz="1400" b="1" dirty="0">
-                <a:solidFill>
-                  <a:srgbClr val="1C3F6E"/>
-                </a:solidFill>
-                <a:latin typeface="Calibri" pitchFamily="34" charset="0"/>
-                <a:ea typeface="Calibri" pitchFamily="34" charset="-122"/>
-                <a:cs typeface="Calibri" pitchFamily="34" charset="-120"/>
-              </a:rPr>
-              <a:t>REFERENCES</a:t>
-            </a:r>
-            <a:endParaRPr lang="en-US" sz="1400" dirty="0"/>
-          </a:p>
-        </p:txBody>
-      </p:sp>
-      <p:pic>
-        <p:nvPicPr>
-          <p:cNvPr id="3" name="Image 0" descr="/home/claude/f4/img/minesec_sheet.png">    </p:cNvPr>
-          <p:cNvPicPr>
-            <a:picLocks noChangeAspect="1"/>
-          </p:cNvPicPr>
-          <p:nvPr/>
-        </p:nvPicPr>
-        <p:blipFill>
-          <a:blip r:embed="rId1"/>
-          <a:stretch>
-            <a:fillRect/>
-          </a:stretch>
-        </p:blipFill>
-        <p:spPr>
-          <a:xfrm>
-            <a:off x="0" y="658368"/>
-            <a:ext cx="5120640" cy="5833872"/>
-          </a:xfrm>
-          <a:prstGeom prst="rect">
-            <a:avLst/>
-          </a:prstGeom>
-        </p:spPr>
-      </p:pic>
-      <p:sp>
-        <p:nvSpPr>
-          <p:cNvPr id="4" name="Text 1"/>
-          <p:cNvSpPr/>
-          <p:nvPr/>
-        </p:nvSpPr>
-        <p:spPr>
-          <a:xfrm>
-            <a:off x="5349240" y="1005840"/>
-            <a:ext cx="6522415" cy="731520"/>
-          </a:xfrm>
-          <a:prstGeom prst="rect">
-            <a:avLst/>
-          </a:prstGeom>
-          <a:noFill/>
-          <a:ln/>
-        </p:spPr>
-        <p:txBody>
-          <a:bodyPr wrap="square" lIns="0" tIns="0" rIns="0" bIns="0" rtlCol="0" anchor="ctr">
-            <a:normAutofit/>
-          </a:bodyPr>
-          <a:lstStyle/>
-          <a:p>
-            <a:pPr algn="ctr" indent="0" marL="0">
-              <a:buNone/>
-            </a:pPr>
-            <a:r>
-              <a:rPr lang="en-US" sz="3600" b="1" dirty="0">
-                <a:solidFill>
-                  <a:srgbClr val="990011"/>
-                </a:solidFill>
-                <a:latin typeface="Times New Roman" pitchFamily="34" charset="0"/>
-                <a:ea typeface="Times New Roman" pitchFamily="34" charset="-122"/>
-                <a:cs typeface="Times New Roman" pitchFamily="34" charset="-120"/>
-              </a:rPr>
-              <a:t>References</a:t>
-            </a:r>
-            <a:endParaRPr lang="en-US" sz="3600" dirty="0"/>
-          </a:p>
-        </p:txBody>
-      </p:sp>
-      <p:sp>
-        <p:nvSpPr>
-          <p:cNvPr id="5" name="Text 2"/>
-          <p:cNvSpPr/>
-          <p:nvPr/>
-        </p:nvSpPr>
-        <p:spPr>
-          <a:xfrm>
-            <a:off x="5349240" y="1783080"/>
-            <a:ext cx="6522415" cy="4663440"/>
-          </a:xfrm>
-          <a:prstGeom prst="rect">
-            <a:avLst/>
-          </a:prstGeom>
-          <a:noFill/>
-          <a:ln/>
-        </p:spPr>
-        <p:txBody>
-          <a:bodyPr wrap="square" lIns="0" tIns="0" rIns="0" bIns="0" rtlCol="0" anchor="t"/>
-          <a:lstStyle/>
-          <a:p>
-            <a:pPr algn="l" marL="342900" indent="-342900">
-              <a:spcAft>
-                <a:spcPts val="800"/>
-              </a:spcAft>
-              <a:buSzPct val="100000"/>
-              <a:buChar char="•"/>
-            </a:pPr>
-            <a:r>
-              <a:rPr lang="en-US" sz="1800" dirty="0">
-                <a:solidFill>
-                  <a:srgbClr val="111111"/>
-                </a:solidFill>
-                <a:latin typeface="Calibri" pitchFamily="34" charset="0"/>
-                <a:ea typeface="Calibri" pitchFamily="34" charset="-122"/>
-                <a:cs typeface="Calibri" pitchFamily="34" charset="-120"/>
-              </a:rPr>
-              <a:t>Geography Syllabus, Forms I–V, MINESEC (2023) — Form 1, Module 2: Preservation of the Environment.</a:t>
-            </a:r>
-            <a:endParaRPr lang="en-US" sz="1800" dirty="0"/>
-          </a:p>
-          <a:p>
-            <a:pPr algn="l" marL="342900" indent="-342900">
-              <a:spcAft>
-                <a:spcPts val="800"/>
-              </a:spcAft>
-              <a:buSzPct val="100000"/>
-              <a:buChar char="•"/>
-            </a:pPr>
-            <a:r>
-              <a:rPr lang="en-US" sz="1800" dirty="0">
-                <a:solidFill>
-                  <a:srgbClr val="111111"/>
-                </a:solidFill>
-                <a:latin typeface="Calibri" pitchFamily="34" charset="0"/>
-                <a:ea typeface="Calibri" pitchFamily="34" charset="-122"/>
-                <a:cs typeface="Calibri" pitchFamily="34" charset="-120"/>
-              </a:rPr>
-              <a:t>Diagrams and animations: drawn for this lesson (Geography Department).</a:t>
-            </a:r>
-            <a:endParaRPr lang="en-US" sz="1800" dirty="0"/>
-          </a:p>
-        </p:txBody>
-      </p:sp>
-      <p:sp>
-        <p:nvSpPr>
-          <p:cNvPr id="25" name="Slide Number Placeholder 0"/>
-          <p:cNvSpPr>
-            <a:spLocks noGrp="1"/>
-          </p:cNvSpPr>
-          <p:nvPr>
-            <p:ph type="sldNum" sz="quarter" idx="4294967295"/>
-          </p:nvPr>
-        </p:nvSpPr>
-        <p:spPr>
-          <a:xfrm>
-            <a:off x="27432" y="91440"/>
-            <a:ext cx="585216" cy="475488"/>
-          </a:xfrm>
-          <a:prstGeom prst="rect">
-            <a:avLst/>
-          </a:prstGeom>
-          <a:extLst>
-            <a:ext uri="{C572A759-6A51-4108-AA02-DFA0A04FC94B}">
-              <ma14:wrappingTextBoxFlag xmlns:ma14="http://schemas.microsoft.com/office/mac/drawingml/2011/main" val="0"/>
-            </a:ext>
-          </a:extLst>
-        </p:spPr>
-        <p:txBody>
-          <a:bodyPr/>
-          <a:lstStyle>
-            <a:lvl1pPr>
-              <a:defRPr sz="2000">
-                <a:solidFill>
-                  <a:srgbClr val="FFFFFF"/>
-                </a:solidFill>
-                <a:latin typeface="Calibri"/>
-                <a:ea typeface="Calibri"/>
-                <a:cs typeface="Calibri"/>
-              </a:defRPr>
-            </a:lvl1pPr>
-          </a:lstStyle>
-          <a:p>
-            <a:pPr algn="ctr"/>
-            <a:fld id="{F7021451-1387-4CA6-816F-3879F97B5CBC}" type="slidenum">
-              <a:rPr b="1" lang="en-US"/>
-              <a:t>51</a:t>
+              <a:t>53</a:t>
             </a:fld>
             <a:endParaRPr lang="en-US"/>
           </a:p>
@@ -21044,7 +21833,7 @@
         <p:spPr>
           <a:xfrm>
             <a:off x="0" y="658368"/>
-            <a:ext cx="5120640" cy="5833872"/>
+            <a:ext cx="2468880" cy="5833872"/>
           </a:xfrm>
           <a:prstGeom prst="rect">
             <a:avLst/>
@@ -21059,8 +21848,8 @@
         </p:nvSpPr>
         <p:spPr>
           <a:xfrm>
-            <a:off x="5349240" y="1005840"/>
-            <a:ext cx="6522415" cy="731520"/>
+            <a:off x="2697480" y="1005840"/>
+            <a:ext cx="9174175" cy="731520"/>
           </a:xfrm>
           <a:prstGeom prst="rect">
             <a:avLst/>
@@ -21100,8 +21889,8 @@
         </p:nvSpPr>
         <p:spPr>
           <a:xfrm>
-            <a:off x="5349240" y="1783080"/>
-            <a:ext cx="6522415" cy="4663440"/>
+            <a:off x="2697480" y="1783080"/>
+            <a:ext cx="9174175" cy="4663440"/>
           </a:xfrm>
           <a:prstGeom prst="rect">
             <a:avLst/>
@@ -21128,7 +21917,7 @@
                 <a:ea typeface="Times New Roman" pitchFamily="34" charset="-122"/>
                 <a:cs typeface="Times New Roman" pitchFamily="34" charset="-120"/>
               </a:rPr>
-              <a:t>The weather station of Garoua airport gives the class a table of 12 monthly temperatures and rainfall amounts. The class must show this information in one clear drawing.</a:t>
+              <a:t>The weather station of Garoua airport gives the class a table of 12 monthly temperatures and rainfall amounts. The table is hard to read. The class asks the teacher: "How can we show all these numbers in one clear drawing?"</a:t>
             </a:r>
             <a:endParaRPr lang="en-US" sz="4000" dirty="0"/>
           </a:p>

--- a/lecons/F1/09_F1_M2_PW04_Construction_and_Reading_of_a_Climograph.pptx
+++ b/lecons/F1/09_F1_M2_PW04_Construction_and_Reading_of_a_Climograph.pptx
@@ -13126,7 +13126,7 @@
         <p:spPr>
           <a:xfrm>
             <a:off x="0" y="658368"/>
-            <a:ext cx="3840480" cy="5833872"/>
+            <a:ext cx="5120640" cy="5833872"/>
           </a:xfrm>
           <a:prstGeom prst="rect">
             <a:avLst/>
@@ -13141,8 +13141,8 @@
         </p:nvSpPr>
         <p:spPr>
           <a:xfrm>
-            <a:off x="4069080" y="1005840"/>
-            <a:ext cx="7802575" cy="731520"/>
+            <a:off x="5349240" y="1005840"/>
+            <a:ext cx="6522415" cy="731520"/>
           </a:xfrm>
           <a:prstGeom prst="rect">
             <a:avLst/>
@@ -13182,8 +13182,8 @@
         </p:nvSpPr>
         <p:spPr>
           <a:xfrm>
-            <a:off x="4069080" y="1783080"/>
-            <a:ext cx="7802575" cy="4663440"/>
+            <a:off x="5349240" y="1783080"/>
+            <a:ext cx="6522415" cy="4663440"/>
           </a:xfrm>
           <a:prstGeom prst="rect">
             <a:avLst/>
@@ -13202,7 +13202,7 @@
               <a:buNone/>
             </a:pPr>
             <a:r>
-              <a:rPr lang="en-US" sz="4000" b="1" dirty="0">
+              <a:rPr lang="en-US" sz="3200" b="1" dirty="0">
                 <a:solidFill>
                   <a:srgbClr val="111111"/>
                 </a:solidFill>
@@ -13212,7 +13212,7 @@
               </a:rPr>
               <a:t>Topic: Let's Preserve our Environment</a:t>
             </a:r>
-            <a:endParaRPr lang="en-US" sz="4000" dirty="0"/>
+            <a:endParaRPr lang="en-US" sz="3200" dirty="0"/>
           </a:p>
           <a:p>
             <a:pPr algn="l" indent="0" marL="0">
@@ -13222,7 +13222,7 @@
               <a:buNone/>
             </a:pPr>
             <a:r>
-              <a:rPr lang="en-US" sz="4000" b="1" dirty="0">
+              <a:rPr lang="en-US" sz="3200" b="1" dirty="0">
                 <a:solidFill>
                   <a:srgbClr val="111111"/>
                 </a:solidFill>
@@ -13232,7 +13232,7 @@
               </a:rPr>
               <a:t>Sub-topic: Natural Regions (Bio-climatic Zones) and their Degradation</a:t>
             </a:r>
-            <a:endParaRPr lang="en-US" sz="4000" dirty="0"/>
+            <a:endParaRPr lang="en-US" sz="3200" dirty="0"/>
           </a:p>
           <a:p>
             <a:pPr algn="l" indent="0" marL="0">
@@ -13242,7 +13242,7 @@
               <a:buNone/>
             </a:pPr>
             <a:r>
-              <a:rPr lang="en-US" sz="4000" b="1" dirty="0">
+              <a:rPr lang="en-US" sz="3200" b="1" dirty="0">
                 <a:solidFill>
                   <a:srgbClr val="990011"/>
                 </a:solidFill>
@@ -13252,7 +13252,7 @@
               </a:rPr>
               <a:t>Practical Work 4: Construction and Reading of a Climograph</a:t>
             </a:r>
-            <a:endParaRPr lang="en-US" sz="4000" dirty="0"/>
+            <a:endParaRPr lang="en-US" sz="3200" dirty="0"/>
           </a:p>
         </p:txBody>
       </p:sp>

--- a/lecons/F1/09_F1_M2_PW04_Construction_and_Reading_of_a_Climograph.pptx
+++ b/lecons/F1/09_F1_M2_PW04_Construction_and_Reading_of_a_Climograph.pptx
@@ -3458,7 +3458,7 @@
           <a:p>
             <a:r>
               <a:rPr lang="en-US" dirty="0"/>
-              <a:t>Before we start the new lesson, let us correct the homework I gave you at the end of Lesson 5: Natural Regions (Bio-climatic Zones) of Cameroon. The question was: Ask an elder how many months of rain there are in Garoua each year and write down the months. Take out your exercise books.</a:t>
+              <a:t>Before we start the new lesson, let us correct the homework I gave you at the end of Lesson 5: Natural Regions (Bio-climatic Zones) of Cameroon. The question was: Name the two elements shown on a climograph. Take out your exercise books.</a:t>
             </a:r>
             <a:endParaRPr lang="en-US" dirty="0"/>
           </a:p>
@@ -4162,7 +4162,7 @@
           <a:p>
             <a:r>
               <a:rPr lang="en-US" dirty="0"/>
-              <a:t>For your homework: Draw the climograph of Garoua using the data given in class. We shall correct it at the beginning of our next lesson.</a:t>
+              <a:t>For your homework: Give two causes of the degradation of natural regions. We shall correct it at the beginning of our next lesson.</a:t>
             </a:r>
             <a:endParaRPr lang="en-US" dirty="0"/>
           </a:p>
@@ -4426,7 +4426,7 @@
           <a:p>
             <a:r>
               <a:rPr lang="en-US" dirty="0"/>
-              <a:t>Here is a good answer. About five to six months, from May to October; the heaviest rains fall in July and August. Compare it with your own answer and correct your work in red.</a:t>
+              <a:t>Here is a good answer. Temperature and rainfall. Compare it with your own answer and correct your work in red.</a:t>
             </a:r>
             <a:endParaRPr lang="en-US" dirty="0"/>
           </a:p>
@@ -15154,7 +15154,7 @@
                 <a:ea typeface="Times New Roman" pitchFamily="34" charset="-122"/>
                 <a:cs typeface="Times New Roman" pitchFamily="34" charset="-120"/>
               </a:rPr>
-              <a:t>Ask an elder how many months of rain there are in Garoua each year and write down the months.</a:t>
+              <a:t>Name the two elements shown on a climograph.</a:t>
             </a:r>
             <a:endParaRPr lang="en-US" sz="4000" dirty="0"/>
           </a:p>
@@ -17045,7 +17045,7 @@
                 <a:ea typeface="Times New Roman" pitchFamily="34" charset="-122"/>
                 <a:cs typeface="Times New Roman" pitchFamily="34" charset="-120"/>
               </a:rPr>
-              <a:t>Draw the climograph of Garoua using the data given in class.</a:t>
+              <a:t>Give two causes of the degradation of natural regions.</a:t>
             </a:r>
             <a:endParaRPr lang="en-US" sz="4000" dirty="0"/>
           </a:p>
@@ -18650,7 +18650,7 @@
                 <a:ea typeface="Times New Roman" pitchFamily="34" charset="-122"/>
                 <a:cs typeface="Times New Roman" pitchFamily="34" charset="-120"/>
               </a:rPr>
-              <a:t>About five to six months, from May to October; the heaviest rains fall in July and August.</a:t>
+              <a:t>Temperature and rainfall.</a:t>
             </a:r>
             <a:endParaRPr lang="en-US" sz="4000" dirty="0"/>
           </a:p>
@@ -19928,7 +19928,7 @@
                           <a:ea typeface="Calibri" pitchFamily="34" charset="-122"/>
                           <a:cs typeface="Calibri" pitchFamily="34" charset="-120"/>
                         </a:rPr>
-                        <a:t>Draw the climograph of Garoua using the data given in class.</a:t>
+                        <a:t>Give two causes of the degradation of natural regions.</a:t>
                       </a:r>
                       <a:endParaRPr lang="en-US" sz="1600" dirty="0">
                         <a:latin typeface="Calibri" charset="0"/>
